--- a/exports/pptx/lessons/middle-module-03-ayurveda-good-health/day-02-tridosha.pptx
+++ b/exports/pptx/lessons/middle-module-03-ayurveda-good-health/day-02-tridosha.pptx
@@ -4046,8 +4046,8 @@
         </p:nvSpPr>
         <p:spPr>
           <a:xfrm>
-            <a:off x="634901" y="2888903"/>
-            <a:ext cx="8102798" cy="487561"/>
+            <a:off x="406301" y="1254323"/>
+            <a:ext cx="8498026" cy="213271"/>
           </a:xfrm>
           <a:prstGeom prst="rect">
             <a:avLst/>
@@ -4059,51 +4059,13 @@
           <a:bodyPr wrap="square" lIns="0" tIns="0" rIns="0" bIns="0" rtlCol="0" anchor="t"/>
           <a:lstStyle/>
           <a:p>
-            <a:pPr algn="l" marL="342900" indent="-342900">
-              <a:lnSpc>
-                <a:spcPts val="1620"/>
-              </a:lnSpc>
-              <a:spcAft>
-                <a:spcPts val="300"/>
-              </a:spcAft>
-              <a:buSzPct val="100000"/>
-              <a:buChar char="•"/>
-            </a:pPr>
-            <a:r>
-              <a:rPr lang="en-US" sz="1200" b="1" dirty="0">
-                <a:solidFill>
-                  <a:srgbClr val="1C2833"/>
-                </a:solidFill>
-                <a:latin typeface="Arial" pitchFamily="34" charset="0"/>
-                <a:ea typeface="Arial" pitchFamily="34" charset="-122"/>
-                <a:cs typeface="Arial" pitchFamily="34" charset="-120"/>
-              </a:rPr>
-              <a:t>Note the connection to Module 2.</a:t>
-            </a:r>
-            <a:pPr algn="l" indent="0" marL="0">
-              <a:lnSpc>
-                <a:spcPts val="1620"/>
-              </a:lnSpc>
-              <a:spcAft>
-                <a:spcPts val="300"/>
-              </a:spcAft>
-              <a:buNone/>
-            </a:pPr>
-            <a:r>
-              <a:rPr lang="en-US" sz="1200" dirty="0">
-                <a:solidFill>
-                  <a:srgbClr val="1C2833"/>
-                </a:solidFill>
-                <a:latin typeface="Arial" pitchFamily="34" charset="0"/>
-                <a:ea typeface="Arial" pitchFamily="34" charset="-122"/>
-                <a:cs typeface="Arial" pitchFamily="34" charset="-120"/>
-              </a:rPr>
-              <a:t> The doshas are built from the </a:t>
-            </a:r>
-            <a:pPr algn="l" indent="0" marL="0">
-              <a:lnSpc>
-                <a:spcPts val="1620"/>
-              </a:lnSpc>
+            <a:pPr algn="l" indent="0" marL="0">
+              <a:lnSpc>
+                <a:spcPts val="1680"/>
+              </a:lnSpc>
+              <a:spcBef>
+                <a:spcPts val="300"/>
+              </a:spcBef>
               <a:spcAft>
                 <a:spcPts val="300"/>
               </a:spcAft>
@@ -4118,27 +4080,7 @@
                 <a:ea typeface="Arial" pitchFamily="34" charset="-122"/>
                 <a:cs typeface="Arial" pitchFamily="34" charset="-120"/>
               </a:rPr>
-              <a:t>pañcabhūta</a:t>
-            </a:r>
-            <a:pPr algn="l" indent="0" marL="0">
-              <a:lnSpc>
-                <a:spcPts val="1620"/>
-              </a:lnSpc>
-              <a:spcAft>
-                <a:spcPts val="300"/>
-              </a:spcAft>
-              <a:buNone/>
-            </a:pPr>
-            <a:r>
-              <a:rPr lang="en-US" sz="1200" dirty="0">
-                <a:solidFill>
-                  <a:srgbClr val="1C2833"/>
-                </a:solidFill>
-                <a:latin typeface="Arial" pitchFamily="34" charset="0"/>
-                <a:ea typeface="Arial" pitchFamily="34" charset="-122"/>
-                <a:cs typeface="Arial" pitchFamily="34" charset="-120"/>
-              </a:rPr>
-              <a:t> (five elements). Each dosha is a particular combination of elements + qualities.</a:t>
+              <a:t>Each row: Dosha · Elements · Qualities · Function · When out of balance.</a:t>
             </a:r>
             <a:endParaRPr lang="en-US" sz="1200" dirty="0"/>
           </a:p>
@@ -4152,8 +4094,8 @@
         </p:nvSpPr>
         <p:spPr>
           <a:xfrm>
-            <a:off x="634901" y="3477964"/>
-            <a:ext cx="8102798" cy="487561"/>
+            <a:off x="634901" y="1556445"/>
+            <a:ext cx="8102798" cy="1386483"/>
           </a:xfrm>
           <a:prstGeom prst="rect">
             <a:avLst/>
@@ -4184,7 +4126,7 @@
                 <a:ea typeface="Arial" pitchFamily="34" charset="-122"/>
                 <a:cs typeface="Arial" pitchFamily="34" charset="-120"/>
               </a:rPr>
-              <a:t>Important framing:</a:t>
+              <a:t>Vāta</a:t>
             </a:r>
             <a:pPr algn="l" indent="0" marL="0">
               <a:lnSpc>
@@ -4204,16 +4146,20 @@
                 <a:ea typeface="Arial" pitchFamily="34" charset="-122"/>
                 <a:cs typeface="Arial" pitchFamily="34" charset="-120"/>
               </a:rPr>
-              <a:t> </a:t>
-            </a:r>
-            <a:pPr algn="l" indent="0" marL="0">
+              <a:t> — air + space · mobile, dry, light, cold, rough · Movement, breath, nervous system · Anxiety, insomnia, dry skin, constipation</a:t>
+            </a:r>
+            <a:endParaRPr lang="en-US" sz="1200" dirty="0"/>
+          </a:p>
+          <a:p>
+            <a:pPr algn="l" marL="342900" indent="-342900">
               <a:lnSpc>
                 <a:spcPts val="1620"/>
               </a:lnSpc>
               <a:spcAft>
                 <a:spcPts val="300"/>
               </a:spcAft>
-              <a:buNone/>
+              <a:buSzPct val="100000"/>
+              <a:buChar char="•"/>
             </a:pPr>
             <a:r>
               <a:rPr lang="en-US" sz="1200" b="1" dirty="0">
@@ -4224,7 +4170,7 @@
                 <a:ea typeface="Arial" pitchFamily="34" charset="-122"/>
                 <a:cs typeface="Arial" pitchFamily="34" charset="-120"/>
               </a:rPr>
-              <a:t>Everyone has all three doshas.</a:t>
+              <a:t>Pitta</a:t>
             </a:r>
             <a:pPr algn="l" indent="0" marL="0">
               <a:lnSpc>
@@ -4244,27 +4190,31 @@
                 <a:ea typeface="Arial" pitchFamily="34" charset="-122"/>
                 <a:cs typeface="Arial" pitchFamily="34" charset="-120"/>
               </a:rPr>
-              <a:t> Your </a:t>
-            </a:r>
-            <a:pPr algn="l" indent="0" marL="0">
+              <a:t> — fire + water · hot, sharp, light, oily, slightly liquid · Digestion, metabolism, vision · Heartburn, irritability, skin inflammation</a:t>
+            </a:r>
+            <a:endParaRPr lang="en-US" sz="1200" dirty="0"/>
+          </a:p>
+          <a:p>
+            <a:pPr algn="l" marL="342900" indent="-342900">
               <a:lnSpc>
                 <a:spcPts val="1620"/>
               </a:lnSpc>
               <a:spcAft>
                 <a:spcPts val="300"/>
               </a:spcAft>
-              <a:buNone/>
-            </a:pPr>
-            <a:r>
-              <a:rPr lang="en-US" sz="1200" i="1" dirty="0">
-                <a:solidFill>
-                  <a:srgbClr val="1C2833"/>
-                </a:solidFill>
-                <a:latin typeface="Arial" pitchFamily="34" charset="0"/>
-                <a:ea typeface="Arial" pitchFamily="34" charset="-122"/>
-                <a:cs typeface="Arial" pitchFamily="34" charset="-120"/>
-              </a:rPr>
-              <a:t>prakṛti</a:t>
+              <a:buSzPct val="100000"/>
+              <a:buChar char="•"/>
+            </a:pPr>
+            <a:r>
+              <a:rPr lang="en-US" sz="1200" b="1" dirty="0">
+                <a:solidFill>
+                  <a:srgbClr val="1C2833"/>
+                </a:solidFill>
+                <a:latin typeface="Arial" pitchFamily="34" charset="0"/>
+                <a:ea typeface="Arial" pitchFamily="34" charset="-122"/>
+                <a:cs typeface="Arial" pitchFamily="34" charset="-120"/>
+              </a:rPr>
+              <a:t>Kapha</a:t>
             </a:r>
             <a:pPr algn="l" indent="0" marL="0">
               <a:lnSpc>
@@ -4284,47 +4234,7 @@
                 <a:ea typeface="Arial" pitchFamily="34" charset="-122"/>
                 <a:cs typeface="Arial" pitchFamily="34" charset="-120"/>
               </a:rPr>
-              <a:t> (constitution) is the proportion you're born with. Your </a:t>
-            </a:r>
-            <a:pPr algn="l" indent="0" marL="0">
-              <a:lnSpc>
-                <a:spcPts val="1620"/>
-              </a:lnSpc>
-              <a:spcAft>
-                <a:spcPts val="300"/>
-              </a:spcAft>
-              <a:buNone/>
-            </a:pPr>
-            <a:r>
-              <a:rPr lang="en-US" sz="1200" i="1" dirty="0">
-                <a:solidFill>
-                  <a:srgbClr val="1C2833"/>
-                </a:solidFill>
-                <a:latin typeface="Arial" pitchFamily="34" charset="0"/>
-                <a:ea typeface="Arial" pitchFamily="34" charset="-122"/>
-                <a:cs typeface="Arial" pitchFamily="34" charset="-120"/>
-              </a:rPr>
-              <a:t>vikṛti</a:t>
-            </a:r>
-            <a:pPr algn="l" indent="0" marL="0">
-              <a:lnSpc>
-                <a:spcPts val="1620"/>
-              </a:lnSpc>
-              <a:spcAft>
-                <a:spcPts val="300"/>
-              </a:spcAft>
-              <a:buNone/>
-            </a:pPr>
-            <a:r>
-              <a:rPr lang="en-US" sz="1200" dirty="0">
-                <a:solidFill>
-                  <a:srgbClr val="1C2833"/>
-                </a:solidFill>
-                <a:latin typeface="Arial" pitchFamily="34" charset="0"/>
-                <a:ea typeface="Arial" pitchFamily="34" charset="-122"/>
-                <a:cs typeface="Arial" pitchFamily="34" charset="-120"/>
-              </a:rPr>
-              <a:t> (current state) is your present balance.</a:t>
+              <a:t> — water + earth · heavy, slow, cool, oily, smooth · Structure, immunity, lubrication · Lethargy, congestion, weight gain</a:t>
             </a:r>
             <a:endParaRPr lang="en-US" sz="1200" dirty="0"/>
           </a:p>
@@ -4338,8 +4248,8 @@
         </p:nvSpPr>
         <p:spPr>
           <a:xfrm>
-            <a:off x="634901" y="4067026"/>
-            <a:ext cx="8102798" cy="281880"/>
+            <a:off x="634901" y="3044428"/>
+            <a:ext cx="8102798" cy="487561"/>
           </a:xfrm>
           <a:prstGeom prst="rect">
             <a:avLst/>
@@ -4370,7 +4280,67 @@
                 <a:ea typeface="Arial" pitchFamily="34" charset="-122"/>
                 <a:cs typeface="Arial" pitchFamily="34" charset="-120"/>
               </a:rPr>
-              <a:t>Where modern medicine agrees, where it doesn't:</a:t>
+              <a:t>Note the connection to Module 2.</a:t>
+            </a:r>
+            <a:pPr algn="l" indent="0" marL="0">
+              <a:lnSpc>
+                <a:spcPts val="1620"/>
+              </a:lnSpc>
+              <a:spcAft>
+                <a:spcPts val="300"/>
+              </a:spcAft>
+              <a:buNone/>
+            </a:pPr>
+            <a:r>
+              <a:rPr lang="en-US" sz="1200" dirty="0">
+                <a:solidFill>
+                  <a:srgbClr val="1C2833"/>
+                </a:solidFill>
+                <a:latin typeface="Arial" pitchFamily="34" charset="0"/>
+                <a:ea typeface="Arial" pitchFamily="34" charset="-122"/>
+                <a:cs typeface="Arial" pitchFamily="34" charset="-120"/>
+              </a:rPr>
+              <a:t> The doshas are built from the </a:t>
+            </a:r>
+            <a:pPr algn="l" indent="0" marL="0">
+              <a:lnSpc>
+                <a:spcPts val="1620"/>
+              </a:lnSpc>
+              <a:spcAft>
+                <a:spcPts val="300"/>
+              </a:spcAft>
+              <a:buNone/>
+            </a:pPr>
+            <a:r>
+              <a:rPr lang="en-US" sz="1200" i="1" dirty="0">
+                <a:solidFill>
+                  <a:srgbClr val="1C2833"/>
+                </a:solidFill>
+                <a:latin typeface="Arial" pitchFamily="34" charset="0"/>
+                <a:ea typeface="Arial" pitchFamily="34" charset="-122"/>
+                <a:cs typeface="Arial" pitchFamily="34" charset="-120"/>
+              </a:rPr>
+              <a:t>pañcabhūta</a:t>
+            </a:r>
+            <a:pPr algn="l" indent="0" marL="0">
+              <a:lnSpc>
+                <a:spcPts val="1620"/>
+              </a:lnSpc>
+              <a:spcAft>
+                <a:spcPts val="300"/>
+              </a:spcAft>
+              <a:buNone/>
+            </a:pPr>
+            <a:r>
+              <a:rPr lang="en-US" sz="1200" dirty="0">
+                <a:solidFill>
+                  <a:srgbClr val="1C2833"/>
+                </a:solidFill>
+                <a:latin typeface="Arial" pitchFamily="34" charset="0"/>
+                <a:ea typeface="Arial" pitchFamily="34" charset="-122"/>
+                <a:cs typeface="Arial" pitchFamily="34" charset="-120"/>
+              </a:rPr>
+              <a:t> (five elements). Each dosha is a particular combination of elements + qualities.</a:t>
             </a:r>
             <a:endParaRPr lang="en-US" sz="1200" dirty="0"/>
           </a:p>
@@ -4384,8 +4354,8 @@
         </p:nvSpPr>
         <p:spPr>
           <a:xfrm>
-            <a:off x="406301" y="4437757"/>
-            <a:ext cx="8498026" cy="639812"/>
+            <a:off x="634901" y="3633490"/>
+            <a:ext cx="8102798" cy="487561"/>
           </a:xfrm>
           <a:prstGeom prst="rect">
             <a:avLst/>
@@ -4397,13 +4367,31 @@
           <a:bodyPr wrap="square" lIns="0" tIns="0" rIns="0" bIns="0" rtlCol="0" anchor="t"/>
           <a:lstStyle/>
           <a:p>
-            <a:pPr algn="l" indent="0" marL="0">
-              <a:lnSpc>
-                <a:spcPts val="1680"/>
-              </a:lnSpc>
-              <a:spcBef>
-                <a:spcPts val="300"/>
-              </a:spcBef>
+            <a:pPr algn="l" marL="342900" indent="-342900">
+              <a:lnSpc>
+                <a:spcPts val="1620"/>
+              </a:lnSpc>
+              <a:spcAft>
+                <a:spcPts val="300"/>
+              </a:spcAft>
+              <a:buSzPct val="100000"/>
+              <a:buChar char="•"/>
+            </a:pPr>
+            <a:r>
+              <a:rPr lang="en-US" sz="1200" b="1" dirty="0">
+                <a:solidFill>
+                  <a:srgbClr val="1C2833"/>
+                </a:solidFill>
+                <a:latin typeface="Arial" pitchFamily="34" charset="0"/>
+                <a:ea typeface="Arial" pitchFamily="34" charset="-122"/>
+                <a:cs typeface="Arial" pitchFamily="34" charset="-120"/>
+              </a:rPr>
+              <a:t>Important framing:</a:t>
+            </a:r>
+            <a:pPr algn="l" indent="0" marL="0">
+              <a:lnSpc>
+                <a:spcPts val="1620"/>
+              </a:lnSpc>
               <a:spcAft>
                 <a:spcPts val="300"/>
               </a:spcAft>
@@ -4418,15 +4406,12 @@
                 <a:ea typeface="Arial" pitchFamily="34" charset="-122"/>
                 <a:cs typeface="Arial" pitchFamily="34" charset="-120"/>
               </a:rPr>
-              <a:t>– Modern lifestyle medicine: agrees on regular sleep, balanced meals, moderate exercise. – Modern circadian biology: agrees on aligning daily activities with body rhythms. – Modern dosha-as-biomedical-category: </a:t>
-            </a:r>
-            <a:pPr algn="l" indent="0" marL="0">
-              <a:lnSpc>
-                <a:spcPts val="1680"/>
-              </a:lnSpc>
-              <a:spcBef>
-                <a:spcPts val="300"/>
-              </a:spcBef>
+              <a:t> </a:t>
+            </a:r>
+            <a:pPr algn="l" indent="0" marL="0">
+              <a:lnSpc>
+                <a:spcPts val="1620"/>
+              </a:lnSpc>
               <a:spcAft>
                 <a:spcPts val="300"/>
               </a:spcAft>
@@ -4441,15 +4426,12 @@
                 <a:ea typeface="Arial" pitchFamily="34" charset="-122"/>
                 <a:cs typeface="Arial" pitchFamily="34" charset="-120"/>
               </a:rPr>
-              <a:t>mixed evidence</a:t>
-            </a:r>
-            <a:pPr algn="l" indent="0" marL="0">
-              <a:lnSpc>
-                <a:spcPts val="1680"/>
-              </a:lnSpc>
-              <a:spcBef>
-                <a:spcPts val="300"/>
-              </a:spcBef>
+              <a:t>Everyone has all three doshas.</a:t>
+            </a:r>
+            <a:pPr algn="l" indent="0" marL="0">
+              <a:lnSpc>
+                <a:spcPts val="1620"/>
+              </a:lnSpc>
               <a:spcAft>
                 <a:spcPts val="300"/>
               </a:spcAft>
@@ -4464,7 +4446,87 @@
                 <a:ea typeface="Arial" pitchFamily="34" charset="-122"/>
                 <a:cs typeface="Arial" pitchFamily="34" charset="-120"/>
               </a:rPr>
-              <a:t>. Some studies show correlates with body type and metabolism; others don't.</a:t>
+              <a:t> Your </a:t>
+            </a:r>
+            <a:pPr algn="l" indent="0" marL="0">
+              <a:lnSpc>
+                <a:spcPts val="1620"/>
+              </a:lnSpc>
+              <a:spcAft>
+                <a:spcPts val="300"/>
+              </a:spcAft>
+              <a:buNone/>
+            </a:pPr>
+            <a:r>
+              <a:rPr lang="en-US" sz="1200" i="1" dirty="0">
+                <a:solidFill>
+                  <a:srgbClr val="1C2833"/>
+                </a:solidFill>
+                <a:latin typeface="Arial" pitchFamily="34" charset="0"/>
+                <a:ea typeface="Arial" pitchFamily="34" charset="-122"/>
+                <a:cs typeface="Arial" pitchFamily="34" charset="-120"/>
+              </a:rPr>
+              <a:t>prakṛti</a:t>
+            </a:r>
+            <a:pPr algn="l" indent="0" marL="0">
+              <a:lnSpc>
+                <a:spcPts val="1620"/>
+              </a:lnSpc>
+              <a:spcAft>
+                <a:spcPts val="300"/>
+              </a:spcAft>
+              <a:buNone/>
+            </a:pPr>
+            <a:r>
+              <a:rPr lang="en-US" sz="1200" dirty="0">
+                <a:solidFill>
+                  <a:srgbClr val="1C2833"/>
+                </a:solidFill>
+                <a:latin typeface="Arial" pitchFamily="34" charset="0"/>
+                <a:ea typeface="Arial" pitchFamily="34" charset="-122"/>
+                <a:cs typeface="Arial" pitchFamily="34" charset="-120"/>
+              </a:rPr>
+              <a:t> (constitution) is the proportion you're born with. Your </a:t>
+            </a:r>
+            <a:pPr algn="l" indent="0" marL="0">
+              <a:lnSpc>
+                <a:spcPts val="1620"/>
+              </a:lnSpc>
+              <a:spcAft>
+                <a:spcPts val="300"/>
+              </a:spcAft>
+              <a:buNone/>
+            </a:pPr>
+            <a:r>
+              <a:rPr lang="en-US" sz="1200" i="1" dirty="0">
+                <a:solidFill>
+                  <a:srgbClr val="1C2833"/>
+                </a:solidFill>
+                <a:latin typeface="Arial" pitchFamily="34" charset="0"/>
+                <a:ea typeface="Arial" pitchFamily="34" charset="-122"/>
+                <a:cs typeface="Arial" pitchFamily="34" charset="-120"/>
+              </a:rPr>
+              <a:t>vikṛti</a:t>
+            </a:r>
+            <a:pPr algn="l" indent="0" marL="0">
+              <a:lnSpc>
+                <a:spcPts val="1620"/>
+              </a:lnSpc>
+              <a:spcAft>
+                <a:spcPts val="300"/>
+              </a:spcAft>
+              <a:buNone/>
+            </a:pPr>
+            <a:r>
+              <a:rPr lang="en-US" sz="1200" dirty="0">
+                <a:solidFill>
+                  <a:srgbClr val="1C2833"/>
+                </a:solidFill>
+                <a:latin typeface="Arial" pitchFamily="34" charset="0"/>
+                <a:ea typeface="Arial" pitchFamily="34" charset="-122"/>
+                <a:cs typeface="Arial" pitchFamily="34" charset="-120"/>
+              </a:rPr>
+              <a:t> (current state) is your present balance.</a:t>
             </a:r>
             <a:endParaRPr lang="en-US" sz="1200" dirty="0"/>
           </a:p>
@@ -4478,7 +4540,147 @@
         </p:nvSpPr>
         <p:spPr>
           <a:xfrm>
-            <a:off x="406301" y="5229969"/>
+            <a:off x="634901" y="4222552"/>
+            <a:ext cx="8102798" cy="281880"/>
+          </a:xfrm>
+          <a:prstGeom prst="rect">
+            <a:avLst/>
+          </a:prstGeom>
+          <a:noFill/>
+          <a:ln/>
+        </p:spPr>
+        <p:txBody>
+          <a:bodyPr wrap="square" lIns="0" tIns="0" rIns="0" bIns="0" rtlCol="0" anchor="t"/>
+          <a:lstStyle/>
+          <a:p>
+            <a:pPr algn="l" marL="342900" indent="-342900">
+              <a:lnSpc>
+                <a:spcPts val="1620"/>
+              </a:lnSpc>
+              <a:spcAft>
+                <a:spcPts val="300"/>
+              </a:spcAft>
+              <a:buSzPct val="100000"/>
+              <a:buChar char="•"/>
+            </a:pPr>
+            <a:r>
+              <a:rPr lang="en-US" sz="1200" b="1" dirty="0">
+                <a:solidFill>
+                  <a:srgbClr val="1C2833"/>
+                </a:solidFill>
+                <a:latin typeface="Arial" pitchFamily="34" charset="0"/>
+                <a:ea typeface="Arial" pitchFamily="34" charset="-122"/>
+                <a:cs typeface="Arial" pitchFamily="34" charset="-120"/>
+              </a:rPr>
+              <a:t>Where modern medicine agrees, where it doesn't:</a:t>
+            </a:r>
+            <a:endParaRPr lang="en-US" sz="1200" dirty="0"/>
+          </a:p>
+        </p:txBody>
+      </p:sp>
+      <p:sp>
+        <p:nvSpPr>
+          <p:cNvPr id="10" name="Text 8"/>
+          <p:cNvSpPr/>
+          <p:nvPr/>
+        </p:nvSpPr>
+        <p:spPr>
+          <a:xfrm>
+            <a:off x="406301" y="4593282"/>
+            <a:ext cx="8498026" cy="639812"/>
+          </a:xfrm>
+          <a:prstGeom prst="rect">
+            <a:avLst/>
+          </a:prstGeom>
+          <a:noFill/>
+          <a:ln/>
+        </p:spPr>
+        <p:txBody>
+          <a:bodyPr wrap="square" lIns="0" tIns="0" rIns="0" bIns="0" rtlCol="0" anchor="t"/>
+          <a:lstStyle/>
+          <a:p>
+            <a:pPr algn="l" indent="0" marL="0">
+              <a:lnSpc>
+                <a:spcPts val="1680"/>
+              </a:lnSpc>
+              <a:spcBef>
+                <a:spcPts val="300"/>
+              </a:spcBef>
+              <a:spcAft>
+                <a:spcPts val="300"/>
+              </a:spcAft>
+              <a:buNone/>
+            </a:pPr>
+            <a:r>
+              <a:rPr lang="en-US" sz="1200" dirty="0">
+                <a:solidFill>
+                  <a:srgbClr val="1C2833"/>
+                </a:solidFill>
+                <a:latin typeface="Arial" pitchFamily="34" charset="0"/>
+                <a:ea typeface="Arial" pitchFamily="34" charset="-122"/>
+                <a:cs typeface="Arial" pitchFamily="34" charset="-120"/>
+              </a:rPr>
+              <a:t>– Modern lifestyle medicine: agrees on regular sleep, balanced meals, moderate exercise. – Modern circadian biology: agrees on aligning daily activities with body rhythms. – Modern dosha-as-biomedical-category: </a:t>
+            </a:r>
+            <a:pPr algn="l" indent="0" marL="0">
+              <a:lnSpc>
+                <a:spcPts val="1680"/>
+              </a:lnSpc>
+              <a:spcBef>
+                <a:spcPts val="300"/>
+              </a:spcBef>
+              <a:spcAft>
+                <a:spcPts val="300"/>
+              </a:spcAft>
+              <a:buNone/>
+            </a:pPr>
+            <a:r>
+              <a:rPr lang="en-US" sz="1200" b="1" dirty="0">
+                <a:solidFill>
+                  <a:srgbClr val="1C2833"/>
+                </a:solidFill>
+                <a:latin typeface="Arial" pitchFamily="34" charset="0"/>
+                <a:ea typeface="Arial" pitchFamily="34" charset="-122"/>
+                <a:cs typeface="Arial" pitchFamily="34" charset="-120"/>
+              </a:rPr>
+              <a:t>mixed evidence</a:t>
+            </a:r>
+            <a:pPr algn="l" indent="0" marL="0">
+              <a:lnSpc>
+                <a:spcPts val="1680"/>
+              </a:lnSpc>
+              <a:spcBef>
+                <a:spcPts val="300"/>
+              </a:spcBef>
+              <a:spcAft>
+                <a:spcPts val="300"/>
+              </a:spcAft>
+              <a:buNone/>
+            </a:pPr>
+            <a:r>
+              <a:rPr lang="en-US" sz="1200" dirty="0">
+                <a:solidFill>
+                  <a:srgbClr val="1C2833"/>
+                </a:solidFill>
+                <a:latin typeface="Arial" pitchFamily="34" charset="0"/>
+                <a:ea typeface="Arial" pitchFamily="34" charset="-122"/>
+                <a:cs typeface="Arial" pitchFamily="34" charset="-120"/>
+              </a:rPr>
+              <a:t>. Some studies show correlates with body type and metabolism; others don't.</a:t>
+            </a:r>
+            <a:endParaRPr lang="en-US" sz="1200" dirty="0"/>
+          </a:p>
+        </p:txBody>
+      </p:sp>
+      <p:sp>
+        <p:nvSpPr>
+          <p:cNvPr id="11" name="Text 9"/>
+          <p:cNvSpPr/>
+          <p:nvPr/>
+        </p:nvSpPr>
+        <p:spPr>
+          <a:xfrm>
+            <a:off x="406301" y="5385495"/>
             <a:ext cx="8498026" cy="213271"/>
           </a:xfrm>
           <a:prstGeom prst="rect">

--- a/exports/pptx/lessons/middle-module-03-ayurveda-good-health/day-02-tridosha.pptx
+++ b/exports/pptx/lessons/middle-module-03-ayurveda-good-health/day-02-tridosha.pptx
@@ -17,9 +17,13 @@
     <p:sldId id="265" r:id="rId11"/>
     <p:sldId id="266" r:id="rId12"/>
     <p:sldId id="267" r:id="rId13"/>
+    <p:sldId id="268" r:id="rId14"/>
+    <p:sldId id="269" r:id="rId15"/>
+    <p:sldId id="270" r:id="rId16"/>
+    <p:sldId id="271" r:id="rId17"/>
   </p:sldIdLst>
   <p:notesMasterIdLst>
-    <p:notesMasterId r:id="rId14"/>
+    <p:notesMasterId r:id="rId18"/>
   </p:notesMasterIdLst>
   <p:sldSz cx="9144000" cy="5143500"/>
   <p:notesSz cx="5143500" cy="9144000"/>
@@ -801,6 +805,358 @@
             <a:fld id="{F7021451-1387-4CA6-816F-3879F97B5CBC}" type="slidenum">
               <a:rPr lang="en-US"/>
               <a:t>12</a:t>
+            </a:fld>
+            <a:endParaRPr lang="en-US"/>
+          </a:p>
+        </p:txBody>
+      </p:sp>
+    </p:spTree>
+    <p:extLst>
+      <p:ext uri="{BB962C8B-B14F-4D97-AF65-F5344CB8AC3E}">
+        <p14:creationId xmlns:p14="http://schemas.microsoft.com/office/powerpoint/2010/main" val="1024086991"/>
+      </p:ext>
+    </p:extLst>
+  </p:cSld>
+  <p:clrMapOvr>
+    <a:masterClrMapping/>
+  </p:clrMapOvr>
+</p:notes>
+</file>
+
+<file path=ppt/notesSlides/notesSlide13.xml><?xml version="1.0" encoding="utf-8"?>
+<p:notes xmlns:a="http://schemas.openxmlformats.org/drawingml/2006/main" xmlns:r="http://schemas.openxmlformats.org/officeDocument/2006/relationships" xmlns:p="http://schemas.openxmlformats.org/presentationml/2006/main">
+  <p:cSld>
+    <p:spTree>
+      <p:nvGrpSpPr>
+        <p:cNvPr id="1" name=""/>
+        <p:cNvGrpSpPr/>
+        <p:nvPr/>
+      </p:nvGrpSpPr>
+      <p:grpSpPr>
+        <a:xfrm>
+          <a:off x="0" y="0"/>
+          <a:ext cx="0" cy="0"/>
+          <a:chOff x="0" y="0"/>
+          <a:chExt cx="0" cy="0"/>
+        </a:xfrm>
+      </p:grpSpPr>
+      <p:sp>
+        <p:nvSpPr>
+          <p:cNvPr id="2" name="Slide Image Placeholder 1"/>
+          <p:cNvSpPr>
+            <a:spLocks noGrp="1" noRot="1" noChangeAspect="1"/>
+          </p:cNvSpPr>
+          <p:nvPr>
+            <p:ph type="sldImg"/>
+          </p:nvPr>
+        </p:nvSpPr>
+        <p:spPr/>
+      </p:sp>
+      <p:sp>
+        <p:nvSpPr>
+          <p:cNvPr id="3" name="Notes Placeholder 2"/>
+          <p:cNvSpPr>
+            <a:spLocks noGrp="1"/>
+          </p:cNvSpPr>
+          <p:nvPr>
+            <p:ph type="body" idx="1"/>
+          </p:nvPr>
+        </p:nvSpPr>
+        <p:spPr/>
+        <p:txBody>
+          <a:bodyPr/>
+          <a:lstStyle/>
+          <a:p>
+            <a:r>
+              <a:rPr lang="en-US" dirty="0"/>
+              <a:t/>
+            </a:r>
+            <a:endParaRPr lang="en-US" dirty="0"/>
+          </a:p>
+        </p:txBody>
+      </p:sp>
+      <p:sp>
+        <p:nvSpPr>
+          <p:cNvPr id="4" name="Slide Number Placeholder 3"/>
+          <p:cNvSpPr>
+            <a:spLocks noGrp="1"/>
+          </p:cNvSpPr>
+          <p:nvPr>
+            <p:ph type="sldNum" sz="quarter" idx="10"/>
+          </p:nvPr>
+        </p:nvSpPr>
+        <p:spPr/>
+        <p:txBody>
+          <a:bodyPr/>
+          <a:lstStyle/>
+          <a:p>
+            <a:fld id="{F7021451-1387-4CA6-816F-3879F97B5CBC}" type="slidenum">
+              <a:rPr lang="en-US"/>
+              <a:t>13</a:t>
+            </a:fld>
+            <a:endParaRPr lang="en-US"/>
+          </a:p>
+        </p:txBody>
+      </p:sp>
+    </p:spTree>
+    <p:extLst>
+      <p:ext uri="{BB962C8B-B14F-4D97-AF65-F5344CB8AC3E}">
+        <p14:creationId xmlns:p14="http://schemas.microsoft.com/office/powerpoint/2010/main" val="1024086991"/>
+      </p:ext>
+    </p:extLst>
+  </p:cSld>
+  <p:clrMapOvr>
+    <a:masterClrMapping/>
+  </p:clrMapOvr>
+</p:notes>
+</file>
+
+<file path=ppt/notesSlides/notesSlide14.xml><?xml version="1.0" encoding="utf-8"?>
+<p:notes xmlns:a="http://schemas.openxmlformats.org/drawingml/2006/main" xmlns:r="http://schemas.openxmlformats.org/officeDocument/2006/relationships" xmlns:p="http://schemas.openxmlformats.org/presentationml/2006/main">
+  <p:cSld>
+    <p:spTree>
+      <p:nvGrpSpPr>
+        <p:cNvPr id="1" name=""/>
+        <p:cNvGrpSpPr/>
+        <p:nvPr/>
+      </p:nvGrpSpPr>
+      <p:grpSpPr>
+        <a:xfrm>
+          <a:off x="0" y="0"/>
+          <a:ext cx="0" cy="0"/>
+          <a:chOff x="0" y="0"/>
+          <a:chExt cx="0" cy="0"/>
+        </a:xfrm>
+      </p:grpSpPr>
+      <p:sp>
+        <p:nvSpPr>
+          <p:cNvPr id="2" name="Slide Image Placeholder 1"/>
+          <p:cNvSpPr>
+            <a:spLocks noGrp="1" noRot="1" noChangeAspect="1"/>
+          </p:cNvSpPr>
+          <p:nvPr>
+            <p:ph type="sldImg"/>
+          </p:nvPr>
+        </p:nvSpPr>
+        <p:spPr/>
+      </p:sp>
+      <p:sp>
+        <p:nvSpPr>
+          <p:cNvPr id="3" name="Notes Placeholder 2"/>
+          <p:cNvSpPr>
+            <a:spLocks noGrp="1"/>
+          </p:cNvSpPr>
+          <p:nvPr>
+            <p:ph type="body" idx="1"/>
+          </p:nvPr>
+        </p:nvSpPr>
+        <p:spPr/>
+        <p:txBody>
+          <a:bodyPr/>
+          <a:lstStyle/>
+          <a:p>
+            <a:r>
+              <a:rPr lang="en-US" dirty="0"/>
+              <a:t/>
+            </a:r>
+            <a:endParaRPr lang="en-US" dirty="0"/>
+          </a:p>
+        </p:txBody>
+      </p:sp>
+      <p:sp>
+        <p:nvSpPr>
+          <p:cNvPr id="4" name="Slide Number Placeholder 3"/>
+          <p:cNvSpPr>
+            <a:spLocks noGrp="1"/>
+          </p:cNvSpPr>
+          <p:nvPr>
+            <p:ph type="sldNum" sz="quarter" idx="10"/>
+          </p:nvPr>
+        </p:nvSpPr>
+        <p:spPr/>
+        <p:txBody>
+          <a:bodyPr/>
+          <a:lstStyle/>
+          <a:p>
+            <a:fld id="{F7021451-1387-4CA6-816F-3879F97B5CBC}" type="slidenum">
+              <a:rPr lang="en-US"/>
+              <a:t>14</a:t>
+            </a:fld>
+            <a:endParaRPr lang="en-US"/>
+          </a:p>
+        </p:txBody>
+      </p:sp>
+    </p:spTree>
+    <p:extLst>
+      <p:ext uri="{BB962C8B-B14F-4D97-AF65-F5344CB8AC3E}">
+        <p14:creationId xmlns:p14="http://schemas.microsoft.com/office/powerpoint/2010/main" val="1024086991"/>
+      </p:ext>
+    </p:extLst>
+  </p:cSld>
+  <p:clrMapOvr>
+    <a:masterClrMapping/>
+  </p:clrMapOvr>
+</p:notes>
+</file>
+
+<file path=ppt/notesSlides/notesSlide15.xml><?xml version="1.0" encoding="utf-8"?>
+<p:notes xmlns:a="http://schemas.openxmlformats.org/drawingml/2006/main" xmlns:r="http://schemas.openxmlformats.org/officeDocument/2006/relationships" xmlns:p="http://schemas.openxmlformats.org/presentationml/2006/main">
+  <p:cSld>
+    <p:spTree>
+      <p:nvGrpSpPr>
+        <p:cNvPr id="1" name=""/>
+        <p:cNvGrpSpPr/>
+        <p:nvPr/>
+      </p:nvGrpSpPr>
+      <p:grpSpPr>
+        <a:xfrm>
+          <a:off x="0" y="0"/>
+          <a:ext cx="0" cy="0"/>
+          <a:chOff x="0" y="0"/>
+          <a:chExt cx="0" cy="0"/>
+        </a:xfrm>
+      </p:grpSpPr>
+      <p:sp>
+        <p:nvSpPr>
+          <p:cNvPr id="2" name="Slide Image Placeholder 1"/>
+          <p:cNvSpPr>
+            <a:spLocks noGrp="1" noRot="1" noChangeAspect="1"/>
+          </p:cNvSpPr>
+          <p:nvPr>
+            <p:ph type="sldImg"/>
+          </p:nvPr>
+        </p:nvSpPr>
+        <p:spPr/>
+      </p:sp>
+      <p:sp>
+        <p:nvSpPr>
+          <p:cNvPr id="3" name="Notes Placeholder 2"/>
+          <p:cNvSpPr>
+            <a:spLocks noGrp="1"/>
+          </p:cNvSpPr>
+          <p:nvPr>
+            <p:ph type="body" idx="1"/>
+          </p:nvPr>
+        </p:nvSpPr>
+        <p:spPr/>
+        <p:txBody>
+          <a:bodyPr/>
+          <a:lstStyle/>
+          <a:p>
+            <a:r>
+              <a:rPr lang="en-US" dirty="0"/>
+              <a:t/>
+            </a:r>
+            <a:endParaRPr lang="en-US" dirty="0"/>
+          </a:p>
+        </p:txBody>
+      </p:sp>
+      <p:sp>
+        <p:nvSpPr>
+          <p:cNvPr id="4" name="Slide Number Placeholder 3"/>
+          <p:cNvSpPr>
+            <a:spLocks noGrp="1"/>
+          </p:cNvSpPr>
+          <p:nvPr>
+            <p:ph type="sldNum" sz="quarter" idx="10"/>
+          </p:nvPr>
+        </p:nvSpPr>
+        <p:spPr/>
+        <p:txBody>
+          <a:bodyPr/>
+          <a:lstStyle/>
+          <a:p>
+            <a:fld id="{F7021451-1387-4CA6-816F-3879F97B5CBC}" type="slidenum">
+              <a:rPr lang="en-US"/>
+              <a:t>15</a:t>
+            </a:fld>
+            <a:endParaRPr lang="en-US"/>
+          </a:p>
+        </p:txBody>
+      </p:sp>
+    </p:spTree>
+    <p:extLst>
+      <p:ext uri="{BB962C8B-B14F-4D97-AF65-F5344CB8AC3E}">
+        <p14:creationId xmlns:p14="http://schemas.microsoft.com/office/powerpoint/2010/main" val="1024086991"/>
+      </p:ext>
+    </p:extLst>
+  </p:cSld>
+  <p:clrMapOvr>
+    <a:masterClrMapping/>
+  </p:clrMapOvr>
+</p:notes>
+</file>
+
+<file path=ppt/notesSlides/notesSlide16.xml><?xml version="1.0" encoding="utf-8"?>
+<p:notes xmlns:a="http://schemas.openxmlformats.org/drawingml/2006/main" xmlns:r="http://schemas.openxmlformats.org/officeDocument/2006/relationships" xmlns:p="http://schemas.openxmlformats.org/presentationml/2006/main">
+  <p:cSld>
+    <p:spTree>
+      <p:nvGrpSpPr>
+        <p:cNvPr id="1" name=""/>
+        <p:cNvGrpSpPr/>
+        <p:nvPr/>
+      </p:nvGrpSpPr>
+      <p:grpSpPr>
+        <a:xfrm>
+          <a:off x="0" y="0"/>
+          <a:ext cx="0" cy="0"/>
+          <a:chOff x="0" y="0"/>
+          <a:chExt cx="0" cy="0"/>
+        </a:xfrm>
+      </p:grpSpPr>
+      <p:sp>
+        <p:nvSpPr>
+          <p:cNvPr id="2" name="Slide Image Placeholder 1"/>
+          <p:cNvSpPr>
+            <a:spLocks noGrp="1" noRot="1" noChangeAspect="1"/>
+          </p:cNvSpPr>
+          <p:nvPr>
+            <p:ph type="sldImg"/>
+          </p:nvPr>
+        </p:nvSpPr>
+        <p:spPr/>
+      </p:sp>
+      <p:sp>
+        <p:nvSpPr>
+          <p:cNvPr id="3" name="Notes Placeholder 2"/>
+          <p:cNvSpPr>
+            <a:spLocks noGrp="1"/>
+          </p:cNvSpPr>
+          <p:nvPr>
+            <p:ph type="body" idx="1"/>
+          </p:nvPr>
+        </p:nvSpPr>
+        <p:spPr/>
+        <p:txBody>
+          <a:bodyPr/>
+          <a:lstStyle/>
+          <a:p>
+            <a:r>
+              <a:rPr lang="en-US" dirty="0"/>
+              <a:t/>
+            </a:r>
+            <a:endParaRPr lang="en-US" dirty="0"/>
+          </a:p>
+        </p:txBody>
+      </p:sp>
+      <p:sp>
+        <p:nvSpPr>
+          <p:cNvPr id="4" name="Slide Number Placeholder 3"/>
+          <p:cNvSpPr>
+            <a:spLocks noGrp="1"/>
+          </p:cNvSpPr>
+          <p:nvPr>
+            <p:ph type="sldNum" sz="quarter" idx="10"/>
+          </p:nvPr>
+        </p:nvSpPr>
+        <p:spPr/>
+        <p:txBody>
+          <a:bodyPr/>
+          <a:lstStyle/>
+          <a:p>
+            <a:fld id="{F7021451-1387-4CA6-816F-3879F97B5CBC}" type="slidenum">
+              <a:rPr lang="en-US"/>
+              <a:t>16</a:t>
             </a:fld>
             <a:endParaRPr lang="en-US"/>
           </a:p>
@@ -2054,102 +2410,6 @@
         </p:nvSpPr>
         <p:spPr>
           <a:xfrm>
-            <a:off x="406301" y="1223963"/>
-            <a:ext cx="8498026" cy="274290"/>
-          </a:xfrm>
-          <a:prstGeom prst="rect">
-            <a:avLst/>
-          </a:prstGeom>
-          <a:noFill/>
-          <a:ln/>
-        </p:spPr>
-        <p:txBody>
-          <a:bodyPr wrap="square" lIns="0" tIns="0" rIns="0" bIns="0" rtlCol="0" anchor="t"/>
-          <a:lstStyle/>
-          <a:p>
-            <a:pPr algn="l" indent="0" marL="0">
-              <a:lnSpc>
-                <a:spcPts val="2160"/>
-              </a:lnSpc>
-              <a:spcBef>
-                <a:spcPts val="600"/>
-              </a:spcBef>
-              <a:spcAft>
-                <a:spcPts val="800"/>
-              </a:spcAft>
-              <a:buNone/>
-            </a:pPr>
-            <a:r>
-              <a:rPr lang="en-US" sz="1800" b="1" dirty="0">
-                <a:solidFill>
-                  <a:srgbClr val="FE4447"/>
-                </a:solidFill>
-                <a:latin typeface="Georgia" pitchFamily="34" charset="0"/>
-                <a:ea typeface="Georgia" pitchFamily="34" charset="-122"/>
-                <a:cs typeface="Georgia" pitchFamily="34" charset="-120"/>
-              </a:rPr>
-              <a:t>Learning objective</a:t>
-            </a:r>
-            <a:endParaRPr lang="en-US" sz="1800" dirty="0"/>
-          </a:p>
-        </p:txBody>
-      </p:sp>
-      <p:sp>
-        <p:nvSpPr>
-          <p:cNvPr id="6" name="Text 4"/>
-          <p:cNvSpPr/>
-          <p:nvPr/>
-        </p:nvSpPr>
-        <p:spPr>
-          <a:xfrm>
-            <a:off x="406301" y="1637854"/>
-            <a:ext cx="8498026" cy="213271"/>
-          </a:xfrm>
-          <a:prstGeom prst="rect">
-            <a:avLst/>
-          </a:prstGeom>
-          <a:noFill/>
-          <a:ln/>
-        </p:spPr>
-        <p:txBody>
-          <a:bodyPr wrap="square" lIns="0" tIns="0" rIns="0" bIns="0" rtlCol="0" anchor="t"/>
-          <a:lstStyle/>
-          <a:p>
-            <a:pPr algn="l" indent="0" marL="0">
-              <a:lnSpc>
-                <a:spcPts val="1680"/>
-              </a:lnSpc>
-              <a:spcBef>
-                <a:spcPts val="300"/>
-              </a:spcBef>
-              <a:spcAft>
-                <a:spcPts val="300"/>
-              </a:spcAft>
-              <a:buNone/>
-            </a:pPr>
-            <a:r>
-              <a:rPr lang="en-US" sz="1200" dirty="0">
-                <a:solidFill>
-                  <a:srgbClr val="1C2833"/>
-                </a:solidFill>
-                <a:latin typeface="Arial" pitchFamily="34" charset="0"/>
-                <a:ea typeface="Arial" pitchFamily="34" charset="-122"/>
-                <a:cs typeface="Arial" pitchFamily="34" charset="-120"/>
-              </a:rPr>
-              <a:t>Students name the three doshas, their elemental basis, characteristic qualities, and one observable sign of each.</a:t>
-            </a:r>
-            <a:endParaRPr lang="en-US" sz="1200" dirty="0"/>
-          </a:p>
-        </p:txBody>
-      </p:sp>
-      <p:sp>
-        <p:nvSpPr>
-          <p:cNvPr id="7" name="Text 5"/>
-          <p:cNvSpPr/>
-          <p:nvPr/>
-        </p:nvSpPr>
-        <p:spPr>
-          <a:xfrm>
             <a:off x="406301" y="4434929"/>
             <a:ext cx="8498026" cy="213271"/>
           </a:xfrm>
@@ -2294,7 +2554,7 @@
                 <a:ea typeface="Georgia" pitchFamily="34" charset="-122"/>
                 <a:cs typeface="Georgia" pitchFamily="34" charset="-120"/>
               </a:rPr>
-              <a:t>Differentiation</a:t>
+              <a:t>Core (25 min) (cont.)</a:t>
             </a:r>
             <a:endParaRPr lang="en-US" sz="1800" dirty="0"/>
           </a:p>
@@ -2309,7 +2569,7 @@
         <p:spPr>
           <a:xfrm>
             <a:off x="634901" y="883593"/>
-            <a:ext cx="8102798" cy="525661"/>
+            <a:ext cx="8102798" cy="281880"/>
           </a:xfrm>
           <a:prstGeom prst="rect">
             <a:avLst/>
@@ -2340,30 +2600,32 @@
                 <a:ea typeface="Arial" pitchFamily="34" charset="-122"/>
                 <a:cs typeface="Arial" pitchFamily="34" charset="-120"/>
               </a:rPr>
-              <a:t>Tier up:</a:t>
-            </a:r>
-            <a:pPr algn="l" indent="0" marL="0">
-              <a:lnSpc>
-                <a:spcPts val="1620"/>
-              </a:lnSpc>
-              <a:spcAft>
-                <a:spcPts val="300"/>
-              </a:spcAft>
-              <a:buNone/>
-            </a:pPr>
-            <a:r>
-              <a:rPr lang="en-US" sz="1200" dirty="0">
-                <a:solidFill>
-                  <a:srgbClr val="1C2833"/>
-                </a:solidFill>
-                <a:latin typeface="Arial" pitchFamily="34" charset="0"/>
-                <a:ea typeface="Arial" pitchFamily="34" charset="-122"/>
-                <a:cs typeface="Arial" pitchFamily="34" charset="-120"/>
-              </a:rPr>
-              <a:t> Read the Caraka Saṃhitā chapter on dosha (in Wujastyk 2003).</a:t>
+              <a:t>Where modern medicine agrees, where it doesn't:</a:t>
             </a:r>
             <a:endParaRPr lang="en-US" sz="1200" dirty="0"/>
           </a:p>
+        </p:txBody>
+      </p:sp>
+      <p:sp>
+        <p:nvSpPr>
+          <p:cNvPr id="5" name="Text 3"/>
+          <p:cNvSpPr/>
+          <p:nvPr/>
+        </p:nvSpPr>
+        <p:spPr>
+          <a:xfrm>
+            <a:off x="634901" y="1266974"/>
+            <a:ext cx="8102798" cy="975122"/>
+          </a:xfrm>
+          <a:prstGeom prst="rect">
+            <a:avLst/>
+          </a:prstGeom>
+          <a:noFill/>
+          <a:ln/>
+        </p:spPr>
+        <p:txBody>
+          <a:bodyPr wrap="square" lIns="0" tIns="0" rIns="0" bIns="0" rtlCol="0" anchor="t"/>
+          <a:lstStyle/>
           <a:p>
             <a:pPr algn="l" marL="342900" indent="-342900">
               <a:lnSpc>
@@ -2376,6 +2638,74 @@
               <a:buChar char="•"/>
             </a:pPr>
             <a:r>
+              <a:rPr lang="en-US" sz="1200" dirty="0">
+                <a:solidFill>
+                  <a:srgbClr val="1C2833"/>
+                </a:solidFill>
+                <a:latin typeface="Arial" pitchFamily="34" charset="0"/>
+                <a:ea typeface="Arial" pitchFamily="34" charset="-122"/>
+                <a:cs typeface="Arial" pitchFamily="34" charset="-120"/>
+              </a:rPr>
+              <a:t>Modern lifestyle medicine: agrees on regular sleep, balanced meals, moderate exercise.</a:t>
+            </a:r>
+            <a:endParaRPr lang="en-US" sz="1200" dirty="0"/>
+          </a:p>
+          <a:p>
+            <a:pPr algn="l" marL="342900" indent="-342900">
+              <a:lnSpc>
+                <a:spcPts val="1620"/>
+              </a:lnSpc>
+              <a:spcAft>
+                <a:spcPts val="300"/>
+              </a:spcAft>
+              <a:buSzPct val="100000"/>
+              <a:buChar char="•"/>
+            </a:pPr>
+            <a:r>
+              <a:rPr lang="en-US" sz="1200" dirty="0">
+                <a:solidFill>
+                  <a:srgbClr val="1C2833"/>
+                </a:solidFill>
+                <a:latin typeface="Arial" pitchFamily="34" charset="0"/>
+                <a:ea typeface="Arial" pitchFamily="34" charset="-122"/>
+                <a:cs typeface="Arial" pitchFamily="34" charset="-120"/>
+              </a:rPr>
+              <a:t>Modern circadian biology: agrees on aligning daily activities with body rhythms.</a:t>
+            </a:r>
+            <a:endParaRPr lang="en-US" sz="1200" dirty="0"/>
+          </a:p>
+          <a:p>
+            <a:pPr algn="l" marL="342900" indent="-342900">
+              <a:lnSpc>
+                <a:spcPts val="1620"/>
+              </a:lnSpc>
+              <a:spcAft>
+                <a:spcPts val="300"/>
+              </a:spcAft>
+              <a:buSzPct val="100000"/>
+              <a:buChar char="•"/>
+            </a:pPr>
+            <a:r>
+              <a:rPr lang="en-US" sz="1200" dirty="0">
+                <a:solidFill>
+                  <a:srgbClr val="1C2833"/>
+                </a:solidFill>
+                <a:latin typeface="Arial" pitchFamily="34" charset="0"/>
+                <a:ea typeface="Arial" pitchFamily="34" charset="-122"/>
+                <a:cs typeface="Arial" pitchFamily="34" charset="-120"/>
+              </a:rPr>
+              <a:t>Modern dosha-as-biomedical-category: </a:t>
+            </a:r>
+            <a:pPr algn="l" indent="0" marL="0">
+              <a:lnSpc>
+                <a:spcPts val="1620"/>
+              </a:lnSpc>
+              <a:spcAft>
+                <a:spcPts val="300"/>
+              </a:spcAft>
+              <a:buNone/>
+            </a:pPr>
+            <a:r>
               <a:rPr lang="en-US" sz="1200" b="1" dirty="0">
                 <a:solidFill>
                   <a:srgbClr val="1C2833"/>
@@ -2384,7 +2714,7 @@
                 <a:ea typeface="Arial" pitchFamily="34" charset="-122"/>
                 <a:cs typeface="Arial" pitchFamily="34" charset="-120"/>
               </a:rPr>
-              <a:t>Tier down:</a:t>
+              <a:t>mixed evidence</a:t>
             </a:r>
             <a:pPr algn="l" indent="0" marL="0">
               <a:lnSpc>
@@ -2404,7 +2734,7 @@
                 <a:ea typeface="Arial" pitchFamily="34" charset="-122"/>
                 <a:cs typeface="Arial" pitchFamily="34" charset="-120"/>
               </a:rPr>
-              <a:t> Memorise just: Vāta (air+space, movement), Pitta (fire+water, digestion), Kapha (water+earth, structure).</a:t>
+              <a:t>. Some studies show correlates with body type and metabolism; others don't.</a:t>
             </a:r>
             <a:endParaRPr lang="en-US" sz="1200" dirty="0"/>
           </a:p>
@@ -2412,7 +2742,7 @@
       </p:sp>
       <p:sp>
         <p:nvSpPr>
-          <p:cNvPr id="5" name="Text 3"/>
+          <p:cNvPr id="6" name="Text 4"/>
           <p:cNvSpPr/>
           <p:nvPr/>
         </p:nvSpPr>
@@ -2562,7 +2892,7 @@
                 <a:ea typeface="Georgia" pitchFamily="34" charset="-122"/>
                 <a:cs typeface="Georgia" pitchFamily="34" charset="-120"/>
               </a:rPr>
-              <a:t>Teacher notes</a:t>
+              <a:t>Activity (10 min) — Sign spotting</a:t>
             </a:r>
             <a:endParaRPr lang="en-US" sz="1800" dirty="0"/>
           </a:p>
@@ -2577,7 +2907,7 @@
         <p:spPr>
           <a:xfrm>
             <a:off x="406301" y="870942"/>
-            <a:ext cx="8498026" cy="426541"/>
+            <a:ext cx="8498026" cy="213271"/>
           </a:xfrm>
           <a:prstGeom prst="rect">
             <a:avLst/>
@@ -2610,7 +2940,7 @@
                 <a:ea typeface="Arial" pitchFamily="34" charset="-122"/>
                 <a:cs typeface="Arial" pitchFamily="34" charset="-120"/>
               </a:rPr>
-              <a:t>– Don't push students to "find their type." The framework is interesting; over-typing is not. – The "everyone has all three" point is critical. Resist the pop-Ayurveda "you ARE Vāta" framing.</a:t>
+              <a:t>Students think of one person they know (not themselves). Write 3 observable traits. Try to match to a dosha tilt.</a:t>
             </a:r>
             <a:endParaRPr lang="en-US" sz="1200" dirty="0"/>
           </a:p>
@@ -2619,6 +2949,54 @@
       <p:sp>
         <p:nvSpPr>
           <p:cNvPr id="5" name="Text 3"/>
+          <p:cNvSpPr/>
+          <p:nvPr/>
+        </p:nvSpPr>
+        <p:spPr>
+          <a:xfrm>
+            <a:off x="406301" y="1160413"/>
+            <a:ext cx="8498026" cy="213271"/>
+          </a:xfrm>
+          <a:prstGeom prst="rect">
+            <a:avLst/>
+          </a:prstGeom>
+          <a:noFill/>
+          <a:ln/>
+        </p:spPr>
+        <p:txBody>
+          <a:bodyPr wrap="square" lIns="0" tIns="0" rIns="0" bIns="0" rtlCol="0" anchor="t"/>
+          <a:lstStyle/>
+          <a:p>
+            <a:pPr algn="l" indent="0" marL="0">
+              <a:lnSpc>
+                <a:spcPts val="1680"/>
+              </a:lnSpc>
+              <a:spcBef>
+                <a:spcPts val="300"/>
+              </a:spcBef>
+              <a:spcAft>
+                <a:spcPts val="300"/>
+              </a:spcAft>
+              <a:buNone/>
+            </a:pPr>
+            <a:r>
+              <a:rPr lang="en-US" sz="1200" dirty="0">
+                <a:solidFill>
+                  <a:srgbClr val="1C2833"/>
+                </a:solidFill>
+                <a:latin typeface="Arial" pitchFamily="34" charset="0"/>
+                <a:ea typeface="Arial" pitchFamily="34" charset="-122"/>
+                <a:cs typeface="Arial" pitchFamily="34" charset="-120"/>
+              </a:rPr>
+              <a:t>(Stress: NOT diagnostic. Just practice with the framework.)</a:t>
+            </a:r>
+            <a:endParaRPr lang="en-US" sz="1200" dirty="0"/>
+          </a:p>
+        </p:txBody>
+      </p:sp>
+      <p:sp>
+        <p:nvSpPr>
+          <p:cNvPr id="6" name="Text 4"/>
           <p:cNvSpPr/>
           <p:nvPr/>
         </p:nvSpPr>
@@ -2768,7 +3146,7 @@
                 <a:ea typeface="Georgia" pitchFamily="34" charset="-122"/>
                 <a:cs typeface="Georgia" pitchFamily="34" charset="-120"/>
               </a:rPr>
-              <a:t>Citation(s) used</a:t>
+              <a:t>Wrap-up (5 min)</a:t>
             </a:r>
             <a:endParaRPr lang="en-US" sz="1800" dirty="0"/>
           </a:p>
@@ -2783,7 +3161,7 @@
         <p:spPr>
           <a:xfrm>
             <a:off x="634901" y="883593"/>
-            <a:ext cx="8102798" cy="300930"/>
+            <a:ext cx="8102798" cy="281880"/>
           </a:xfrm>
           <a:prstGeom prst="rect">
             <a:avLst/>
@@ -2814,7 +3192,7 @@
                 <a:ea typeface="Arial" pitchFamily="34" charset="-122"/>
                 <a:cs typeface="Arial" pitchFamily="34" charset="-120"/>
               </a:rPr>
-              <a:t>vidya-karana RAG cache </a:t>
+              <a:t>Preview Day 3: </a:t>
             </a:r>
             <a:pPr algn="l" indent="0" marL="0">
               <a:lnSpc>
@@ -2826,35 +3204,15 @@
               <a:buNone/>
             </a:pPr>
             <a:r>
-              <a:rPr lang="en-US" sz="1200" dirty="0">
-                <a:solidFill>
-                  <a:srgbClr val="1C2833"/>
-                </a:solidFill>
-                <a:latin typeface="Arial" pitchFamily="34" charset="0"/>
-                <a:ea typeface="Arial" pitchFamily="34" charset="-122"/>
-                <a:cs typeface="Arial" pitchFamily="34" charset="-120"/>
-              </a:rPr>
-              <a:t>day-02-tridosha.json</a:t>
-            </a:r>
-            <a:pPr algn="l" indent="0" marL="0">
-              <a:lnSpc>
-                <a:spcPts val="1620"/>
-              </a:lnSpc>
-              <a:spcAft>
-                <a:spcPts val="300"/>
-              </a:spcAft>
-              <a:buNone/>
-            </a:pPr>
-            <a:r>
-              <a:rPr lang="en-US" sz="1200" dirty="0">
-                <a:solidFill>
-                  <a:srgbClr val="1C2833"/>
-                </a:solidFill>
-                <a:latin typeface="Arial" pitchFamily="34" charset="0"/>
-                <a:ea typeface="Arial" pitchFamily="34" charset="-122"/>
-                <a:cs typeface="Arial" pitchFamily="34" charset="-120"/>
-              </a:rPr>
-              <a:t>.</a:t>
+              <a:rPr lang="en-US" sz="1200" i="1" dirty="0">
+                <a:solidFill>
+                  <a:srgbClr val="1C2833"/>
+                </a:solidFill>
+                <a:latin typeface="Arial" pitchFamily="34" charset="0"/>
+                <a:ea typeface="Arial" pitchFamily="34" charset="-122"/>
+                <a:cs typeface="Arial" pitchFamily="34" charset="-120"/>
+              </a:rPr>
+              <a:t>"Tomorrow — your own self-assessment. With caveats."</a:t>
             </a:r>
             <a:endParaRPr lang="en-US" sz="1200" dirty="0"/>
           </a:p>
@@ -2868,7 +3226,7 @@
         </p:nvSpPr>
         <p:spPr>
           <a:xfrm>
-            <a:off x="406301" y="1273373"/>
+            <a:off x="406301" y="4434929"/>
             <a:ext cx="8498026" cy="213271"/>
           </a:xfrm>
           <a:prstGeom prst="rect">
@@ -2902,15 +3260,935 @@
                 <a:ea typeface="Arial" pitchFamily="34" charset="-122"/>
                 <a:cs typeface="Arial" pitchFamily="34" charset="-120"/>
               </a:rPr>
-              <a:t>– Wujastyk (2003) for classical Tridosha exposition.</a:t>
+              <a:t>Middle ·  · IKS Curriculum</a:t>
             </a:r>
             <a:endParaRPr lang="en-US" sz="1200" dirty="0"/>
           </a:p>
         </p:txBody>
       </p:sp>
-      <p:sp>
-        <p:nvSpPr>
-          <p:cNvPr id="6" name="Text 4"/>
+    </p:spTree>
+  </p:cSld>
+  <p:clrMapOvr>
+    <a:masterClrMapping/>
+  </p:clrMapOvr>
+</p:sld>
+</file>
+
+<file path=ppt/slides/slide13.xml><?xml version="1.0" encoding="utf-8"?>
+<p:sld xmlns:a="http://schemas.openxmlformats.org/drawingml/2006/main" xmlns:r="http://schemas.openxmlformats.org/officeDocument/2006/relationships" xmlns:p="http://schemas.openxmlformats.org/presentationml/2006/main">
+  <p:cSld name="Slide 13">
+    <p:bg>
+      <p:bgPr>
+        <a:solidFill>
+          <a:srgbClr val="FFFFFF"/>
+        </a:solidFill>
+      </p:bgPr>
+    </p:bg>
+    <p:spTree>
+      <p:nvGrpSpPr>
+        <p:cNvPr id="1" name=""/>
+        <p:cNvGrpSpPr/>
+        <p:nvPr/>
+      </p:nvGrpSpPr>
+      <p:grpSpPr>
+        <a:xfrm>
+          <a:off x="0" y="0"/>
+          <a:ext cx="0" cy="0"/>
+          <a:chOff x="0" y="0"/>
+          <a:chExt cx="0" cy="0"/>
+        </a:xfrm>
+      </p:grpSpPr>
+      <p:sp>
+        <p:nvSpPr>
+          <p:cNvPr id="2" name="Text 0"/>
+          <p:cNvSpPr/>
+          <p:nvPr/>
+        </p:nvSpPr>
+        <p:spPr>
+          <a:xfrm>
+            <a:off x="0" y="0"/>
+            <a:ext cx="9144000" cy="101501"/>
+          </a:xfrm>
+          <a:prstGeom prst="rect">
+            <a:avLst/>
+          </a:prstGeom>
+          <a:solidFill>
+            <a:srgbClr val="277884"/>
+          </a:solidFill>
+          <a:ln/>
+        </p:spPr>
+        <p:txBody>
+          <a:bodyPr wrap="square" rtlCol="0" anchor="ctr"/>
+          <a:lstStyle/>
+          <a:p>
+            <a:pPr indent="0" marL="0">
+              <a:buNone/>
+            </a:pPr>
+            <a:endParaRPr lang="en-US" dirty="0"/>
+          </a:p>
+        </p:txBody>
+      </p:sp>
+      <p:sp>
+        <p:nvSpPr>
+          <p:cNvPr id="3" name="Text 1"/>
+          <p:cNvSpPr/>
+          <p:nvPr/>
+        </p:nvSpPr>
+        <p:spPr>
+          <a:xfrm>
+            <a:off x="406301" y="457051"/>
+            <a:ext cx="8498026" cy="274290"/>
+          </a:xfrm>
+          <a:prstGeom prst="rect">
+            <a:avLst/>
+          </a:prstGeom>
+          <a:noFill/>
+          <a:ln/>
+        </p:spPr>
+        <p:txBody>
+          <a:bodyPr wrap="square" lIns="0" tIns="0" rIns="0" bIns="0" rtlCol="0" anchor="t"/>
+          <a:lstStyle/>
+          <a:p>
+            <a:pPr algn="l" indent="0" marL="0">
+              <a:lnSpc>
+                <a:spcPts val="2160"/>
+              </a:lnSpc>
+              <a:spcBef>
+                <a:spcPts val="600"/>
+              </a:spcBef>
+              <a:spcAft>
+                <a:spcPts val="800"/>
+              </a:spcAft>
+              <a:buNone/>
+            </a:pPr>
+            <a:r>
+              <a:rPr lang="en-US" sz="1800" b="1" dirty="0">
+                <a:solidFill>
+                  <a:srgbClr val="FE4447"/>
+                </a:solidFill>
+                <a:latin typeface="Georgia" pitchFamily="34" charset="0"/>
+                <a:ea typeface="Georgia" pitchFamily="34" charset="-122"/>
+                <a:cs typeface="Georgia" pitchFamily="34" charset="-120"/>
+              </a:rPr>
+              <a:t>Homework</a:t>
+            </a:r>
+            <a:endParaRPr lang="en-US" sz="1800" dirty="0"/>
+          </a:p>
+        </p:txBody>
+      </p:sp>
+      <p:sp>
+        <p:nvSpPr>
+          <p:cNvPr id="4" name="Text 2"/>
+          <p:cNvSpPr/>
+          <p:nvPr/>
+        </p:nvSpPr>
+        <p:spPr>
+          <a:xfrm>
+            <a:off x="634901" y="883593"/>
+            <a:ext cx="8102798" cy="281880"/>
+          </a:xfrm>
+          <a:prstGeom prst="rect">
+            <a:avLst/>
+          </a:prstGeom>
+          <a:noFill/>
+          <a:ln/>
+        </p:spPr>
+        <p:txBody>
+          <a:bodyPr wrap="square" lIns="0" tIns="0" rIns="0" bIns="0" rtlCol="0" anchor="t"/>
+          <a:lstStyle/>
+          <a:p>
+            <a:pPr algn="l" marL="342900" indent="-342900">
+              <a:lnSpc>
+                <a:spcPts val="1620"/>
+              </a:lnSpc>
+              <a:spcAft>
+                <a:spcPts val="300"/>
+              </a:spcAft>
+              <a:buSzPct val="100000"/>
+              <a:buChar char="•"/>
+            </a:pPr>
+            <a:r>
+              <a:rPr lang="en-US" sz="1200" dirty="0">
+                <a:solidFill>
+                  <a:srgbClr val="1C2833"/>
+                </a:solidFill>
+                <a:latin typeface="Arial" pitchFamily="34" charset="0"/>
+                <a:ea typeface="Arial" pitchFamily="34" charset="-122"/>
+                <a:cs typeface="Arial" pitchFamily="34" charset="-120"/>
+              </a:rPr>
+              <a:t>Notice tonight: what did you eat? When? How did you feel after? Take notes.</a:t>
+            </a:r>
+            <a:endParaRPr lang="en-US" sz="1200" dirty="0"/>
+          </a:p>
+        </p:txBody>
+      </p:sp>
+      <p:sp>
+        <p:nvSpPr>
+          <p:cNvPr id="5" name="Text 3"/>
+          <p:cNvSpPr/>
+          <p:nvPr/>
+        </p:nvSpPr>
+        <p:spPr>
+          <a:xfrm>
+            <a:off x="406301" y="4434929"/>
+            <a:ext cx="8498026" cy="213271"/>
+          </a:xfrm>
+          <a:prstGeom prst="rect">
+            <a:avLst/>
+          </a:prstGeom>
+          <a:noFill/>
+          <a:ln/>
+        </p:spPr>
+        <p:txBody>
+          <a:bodyPr wrap="square" lIns="0" tIns="0" rIns="0" bIns="0" rtlCol="0" anchor="t"/>
+          <a:lstStyle/>
+          <a:p>
+            <a:pPr algn="l" indent="0" marL="0">
+              <a:lnSpc>
+                <a:spcPts val="1680"/>
+              </a:lnSpc>
+              <a:spcBef>
+                <a:spcPts val="300"/>
+              </a:spcBef>
+              <a:spcAft>
+                <a:spcPts val="300"/>
+              </a:spcAft>
+              <a:buNone/>
+            </a:pPr>
+            <a:r>
+              <a:rPr lang="en-US" sz="1200" dirty="0">
+                <a:solidFill>
+                  <a:srgbClr val="1C2833"/>
+                </a:solidFill>
+                <a:latin typeface="Arial" pitchFamily="34" charset="0"/>
+                <a:ea typeface="Arial" pitchFamily="34" charset="-122"/>
+                <a:cs typeface="Arial" pitchFamily="34" charset="-120"/>
+              </a:rPr>
+              <a:t>Middle ·  · IKS Curriculum</a:t>
+            </a:r>
+            <a:endParaRPr lang="en-US" sz="1200" dirty="0"/>
+          </a:p>
+        </p:txBody>
+      </p:sp>
+    </p:spTree>
+  </p:cSld>
+  <p:clrMapOvr>
+    <a:masterClrMapping/>
+  </p:clrMapOvr>
+</p:sld>
+</file>
+
+<file path=ppt/slides/slide14.xml><?xml version="1.0" encoding="utf-8"?>
+<p:sld xmlns:a="http://schemas.openxmlformats.org/drawingml/2006/main" xmlns:r="http://schemas.openxmlformats.org/officeDocument/2006/relationships" xmlns:p="http://schemas.openxmlformats.org/presentationml/2006/main">
+  <p:cSld name="Slide 14">
+    <p:bg>
+      <p:bgPr>
+        <a:solidFill>
+          <a:srgbClr val="FFFFFF"/>
+        </a:solidFill>
+      </p:bgPr>
+    </p:bg>
+    <p:spTree>
+      <p:nvGrpSpPr>
+        <p:cNvPr id="1" name=""/>
+        <p:cNvGrpSpPr/>
+        <p:nvPr/>
+      </p:nvGrpSpPr>
+      <p:grpSpPr>
+        <a:xfrm>
+          <a:off x="0" y="0"/>
+          <a:ext cx="0" cy="0"/>
+          <a:chOff x="0" y="0"/>
+          <a:chExt cx="0" cy="0"/>
+        </a:xfrm>
+      </p:grpSpPr>
+      <p:sp>
+        <p:nvSpPr>
+          <p:cNvPr id="2" name="Text 0"/>
+          <p:cNvSpPr/>
+          <p:nvPr/>
+        </p:nvSpPr>
+        <p:spPr>
+          <a:xfrm>
+            <a:off x="0" y="0"/>
+            <a:ext cx="9144000" cy="101501"/>
+          </a:xfrm>
+          <a:prstGeom prst="rect">
+            <a:avLst/>
+          </a:prstGeom>
+          <a:solidFill>
+            <a:srgbClr val="277884"/>
+          </a:solidFill>
+          <a:ln/>
+        </p:spPr>
+        <p:txBody>
+          <a:bodyPr wrap="square" rtlCol="0" anchor="ctr"/>
+          <a:lstStyle/>
+          <a:p>
+            <a:pPr indent="0" marL="0">
+              <a:buNone/>
+            </a:pPr>
+            <a:endParaRPr lang="en-US" dirty="0"/>
+          </a:p>
+        </p:txBody>
+      </p:sp>
+      <p:sp>
+        <p:nvSpPr>
+          <p:cNvPr id="3" name="Text 1"/>
+          <p:cNvSpPr/>
+          <p:nvPr/>
+        </p:nvSpPr>
+        <p:spPr>
+          <a:xfrm>
+            <a:off x="406301" y="457051"/>
+            <a:ext cx="8498026" cy="274290"/>
+          </a:xfrm>
+          <a:prstGeom prst="rect">
+            <a:avLst/>
+          </a:prstGeom>
+          <a:noFill/>
+          <a:ln/>
+        </p:spPr>
+        <p:txBody>
+          <a:bodyPr wrap="square" lIns="0" tIns="0" rIns="0" bIns="0" rtlCol="0" anchor="t"/>
+          <a:lstStyle/>
+          <a:p>
+            <a:pPr algn="l" indent="0" marL="0">
+              <a:lnSpc>
+                <a:spcPts val="2160"/>
+              </a:lnSpc>
+              <a:spcBef>
+                <a:spcPts val="600"/>
+              </a:spcBef>
+              <a:spcAft>
+                <a:spcPts val="800"/>
+              </a:spcAft>
+              <a:buNone/>
+            </a:pPr>
+            <a:r>
+              <a:rPr lang="en-US" sz="1800" b="1" dirty="0">
+                <a:solidFill>
+                  <a:srgbClr val="FE4447"/>
+                </a:solidFill>
+                <a:latin typeface="Georgia" pitchFamily="34" charset="0"/>
+                <a:ea typeface="Georgia" pitchFamily="34" charset="-122"/>
+                <a:cs typeface="Georgia" pitchFamily="34" charset="-120"/>
+              </a:rPr>
+              <a:t>Differentiation</a:t>
+            </a:r>
+            <a:endParaRPr lang="en-US" sz="1800" dirty="0"/>
+          </a:p>
+        </p:txBody>
+      </p:sp>
+      <p:sp>
+        <p:nvSpPr>
+          <p:cNvPr id="4" name="Text 2"/>
+          <p:cNvSpPr/>
+          <p:nvPr/>
+        </p:nvSpPr>
+        <p:spPr>
+          <a:xfrm>
+            <a:off x="634901" y="883593"/>
+            <a:ext cx="8102798" cy="525661"/>
+          </a:xfrm>
+          <a:prstGeom prst="rect">
+            <a:avLst/>
+          </a:prstGeom>
+          <a:noFill/>
+          <a:ln/>
+        </p:spPr>
+        <p:txBody>
+          <a:bodyPr wrap="square" lIns="0" tIns="0" rIns="0" bIns="0" rtlCol="0" anchor="t"/>
+          <a:lstStyle/>
+          <a:p>
+            <a:pPr algn="l" marL="342900" indent="-342900">
+              <a:lnSpc>
+                <a:spcPts val="1620"/>
+              </a:lnSpc>
+              <a:spcAft>
+                <a:spcPts val="300"/>
+              </a:spcAft>
+              <a:buSzPct val="100000"/>
+              <a:buChar char="•"/>
+            </a:pPr>
+            <a:r>
+              <a:rPr lang="en-US" sz="1200" b="1" dirty="0">
+                <a:solidFill>
+                  <a:srgbClr val="1C2833"/>
+                </a:solidFill>
+                <a:latin typeface="Arial" pitchFamily="34" charset="0"/>
+                <a:ea typeface="Arial" pitchFamily="34" charset="-122"/>
+                <a:cs typeface="Arial" pitchFamily="34" charset="-120"/>
+              </a:rPr>
+              <a:t>Tier up:</a:t>
+            </a:r>
+            <a:pPr algn="l" indent="0" marL="0">
+              <a:lnSpc>
+                <a:spcPts val="1620"/>
+              </a:lnSpc>
+              <a:spcAft>
+                <a:spcPts val="300"/>
+              </a:spcAft>
+              <a:buNone/>
+            </a:pPr>
+            <a:r>
+              <a:rPr lang="en-US" sz="1200" dirty="0">
+                <a:solidFill>
+                  <a:srgbClr val="1C2833"/>
+                </a:solidFill>
+                <a:latin typeface="Arial" pitchFamily="34" charset="0"/>
+                <a:ea typeface="Arial" pitchFamily="34" charset="-122"/>
+                <a:cs typeface="Arial" pitchFamily="34" charset="-120"/>
+              </a:rPr>
+              <a:t> Read the Caraka Saṃhitā chapter on dosha (in Wujastyk 2003).</a:t>
+            </a:r>
+            <a:endParaRPr lang="en-US" sz="1200" dirty="0"/>
+          </a:p>
+          <a:p>
+            <a:pPr algn="l" marL="342900" indent="-342900">
+              <a:lnSpc>
+                <a:spcPts val="1620"/>
+              </a:lnSpc>
+              <a:spcAft>
+                <a:spcPts val="300"/>
+              </a:spcAft>
+              <a:buSzPct val="100000"/>
+              <a:buChar char="•"/>
+            </a:pPr>
+            <a:r>
+              <a:rPr lang="en-US" sz="1200" b="1" dirty="0">
+                <a:solidFill>
+                  <a:srgbClr val="1C2833"/>
+                </a:solidFill>
+                <a:latin typeface="Arial" pitchFamily="34" charset="0"/>
+                <a:ea typeface="Arial" pitchFamily="34" charset="-122"/>
+                <a:cs typeface="Arial" pitchFamily="34" charset="-120"/>
+              </a:rPr>
+              <a:t>Tier down:</a:t>
+            </a:r>
+            <a:pPr algn="l" indent="0" marL="0">
+              <a:lnSpc>
+                <a:spcPts val="1620"/>
+              </a:lnSpc>
+              <a:spcAft>
+                <a:spcPts val="300"/>
+              </a:spcAft>
+              <a:buNone/>
+            </a:pPr>
+            <a:r>
+              <a:rPr lang="en-US" sz="1200" dirty="0">
+                <a:solidFill>
+                  <a:srgbClr val="1C2833"/>
+                </a:solidFill>
+                <a:latin typeface="Arial" pitchFamily="34" charset="0"/>
+                <a:ea typeface="Arial" pitchFamily="34" charset="-122"/>
+                <a:cs typeface="Arial" pitchFamily="34" charset="-120"/>
+              </a:rPr>
+              <a:t> Memorise just: Vāta (air+space, movement), Pitta (fire+water, digestion), Kapha (water+earth, structure).</a:t>
+            </a:r>
+            <a:endParaRPr lang="en-US" sz="1200" dirty="0"/>
+          </a:p>
+        </p:txBody>
+      </p:sp>
+      <p:sp>
+        <p:nvSpPr>
+          <p:cNvPr id="5" name="Text 3"/>
+          <p:cNvSpPr/>
+          <p:nvPr/>
+        </p:nvSpPr>
+        <p:spPr>
+          <a:xfrm>
+            <a:off x="406301" y="4434929"/>
+            <a:ext cx="8498026" cy="213271"/>
+          </a:xfrm>
+          <a:prstGeom prst="rect">
+            <a:avLst/>
+          </a:prstGeom>
+          <a:noFill/>
+          <a:ln/>
+        </p:spPr>
+        <p:txBody>
+          <a:bodyPr wrap="square" lIns="0" tIns="0" rIns="0" bIns="0" rtlCol="0" anchor="t"/>
+          <a:lstStyle/>
+          <a:p>
+            <a:pPr algn="l" indent="0" marL="0">
+              <a:lnSpc>
+                <a:spcPts val="1680"/>
+              </a:lnSpc>
+              <a:spcBef>
+                <a:spcPts val="300"/>
+              </a:spcBef>
+              <a:spcAft>
+                <a:spcPts val="300"/>
+              </a:spcAft>
+              <a:buNone/>
+            </a:pPr>
+            <a:r>
+              <a:rPr lang="en-US" sz="1200" dirty="0">
+                <a:solidFill>
+                  <a:srgbClr val="1C2833"/>
+                </a:solidFill>
+                <a:latin typeface="Arial" pitchFamily="34" charset="0"/>
+                <a:ea typeface="Arial" pitchFamily="34" charset="-122"/>
+                <a:cs typeface="Arial" pitchFamily="34" charset="-120"/>
+              </a:rPr>
+              <a:t>Middle ·  · IKS Curriculum</a:t>
+            </a:r>
+            <a:endParaRPr lang="en-US" sz="1200" dirty="0"/>
+          </a:p>
+        </p:txBody>
+      </p:sp>
+    </p:spTree>
+  </p:cSld>
+  <p:clrMapOvr>
+    <a:masterClrMapping/>
+  </p:clrMapOvr>
+</p:sld>
+</file>
+
+<file path=ppt/slides/slide15.xml><?xml version="1.0" encoding="utf-8"?>
+<p:sld xmlns:a="http://schemas.openxmlformats.org/drawingml/2006/main" xmlns:r="http://schemas.openxmlformats.org/officeDocument/2006/relationships" xmlns:p="http://schemas.openxmlformats.org/presentationml/2006/main">
+  <p:cSld name="Slide 15">
+    <p:bg>
+      <p:bgPr>
+        <a:solidFill>
+          <a:srgbClr val="FFFFFF"/>
+        </a:solidFill>
+      </p:bgPr>
+    </p:bg>
+    <p:spTree>
+      <p:nvGrpSpPr>
+        <p:cNvPr id="1" name=""/>
+        <p:cNvGrpSpPr/>
+        <p:nvPr/>
+      </p:nvGrpSpPr>
+      <p:grpSpPr>
+        <a:xfrm>
+          <a:off x="0" y="0"/>
+          <a:ext cx="0" cy="0"/>
+          <a:chOff x="0" y="0"/>
+          <a:chExt cx="0" cy="0"/>
+        </a:xfrm>
+      </p:grpSpPr>
+      <p:sp>
+        <p:nvSpPr>
+          <p:cNvPr id="2" name="Text 0"/>
+          <p:cNvSpPr/>
+          <p:nvPr/>
+        </p:nvSpPr>
+        <p:spPr>
+          <a:xfrm>
+            <a:off x="0" y="0"/>
+            <a:ext cx="9144000" cy="101501"/>
+          </a:xfrm>
+          <a:prstGeom prst="rect">
+            <a:avLst/>
+          </a:prstGeom>
+          <a:solidFill>
+            <a:srgbClr val="277884"/>
+          </a:solidFill>
+          <a:ln/>
+        </p:spPr>
+        <p:txBody>
+          <a:bodyPr wrap="square" rtlCol="0" anchor="ctr"/>
+          <a:lstStyle/>
+          <a:p>
+            <a:pPr indent="0" marL="0">
+              <a:buNone/>
+            </a:pPr>
+            <a:endParaRPr lang="en-US" dirty="0"/>
+          </a:p>
+        </p:txBody>
+      </p:sp>
+      <p:sp>
+        <p:nvSpPr>
+          <p:cNvPr id="3" name="Text 1"/>
+          <p:cNvSpPr/>
+          <p:nvPr/>
+        </p:nvSpPr>
+        <p:spPr>
+          <a:xfrm>
+            <a:off x="406301" y="457051"/>
+            <a:ext cx="8498026" cy="274290"/>
+          </a:xfrm>
+          <a:prstGeom prst="rect">
+            <a:avLst/>
+          </a:prstGeom>
+          <a:noFill/>
+          <a:ln/>
+        </p:spPr>
+        <p:txBody>
+          <a:bodyPr wrap="square" lIns="0" tIns="0" rIns="0" bIns="0" rtlCol="0" anchor="t"/>
+          <a:lstStyle/>
+          <a:p>
+            <a:pPr algn="l" indent="0" marL="0">
+              <a:lnSpc>
+                <a:spcPts val="2160"/>
+              </a:lnSpc>
+              <a:spcBef>
+                <a:spcPts val="600"/>
+              </a:spcBef>
+              <a:spcAft>
+                <a:spcPts val="800"/>
+              </a:spcAft>
+              <a:buNone/>
+            </a:pPr>
+            <a:r>
+              <a:rPr lang="en-US" sz="1800" b="1" dirty="0">
+                <a:solidFill>
+                  <a:srgbClr val="FE4447"/>
+                </a:solidFill>
+                <a:latin typeface="Georgia" pitchFamily="34" charset="0"/>
+                <a:ea typeface="Georgia" pitchFamily="34" charset="-122"/>
+                <a:cs typeface="Georgia" pitchFamily="34" charset="-120"/>
+              </a:rPr>
+              <a:t>Teacher notes</a:t>
+            </a:r>
+            <a:endParaRPr lang="en-US" sz="1800" dirty="0"/>
+          </a:p>
+        </p:txBody>
+      </p:sp>
+      <p:sp>
+        <p:nvSpPr>
+          <p:cNvPr id="4" name="Text 2"/>
+          <p:cNvSpPr/>
+          <p:nvPr/>
+        </p:nvSpPr>
+        <p:spPr>
+          <a:xfrm>
+            <a:off x="634901" y="883593"/>
+            <a:ext cx="8102798" cy="525661"/>
+          </a:xfrm>
+          <a:prstGeom prst="rect">
+            <a:avLst/>
+          </a:prstGeom>
+          <a:noFill/>
+          <a:ln/>
+        </p:spPr>
+        <p:txBody>
+          <a:bodyPr wrap="square" lIns="0" tIns="0" rIns="0" bIns="0" rtlCol="0" anchor="t"/>
+          <a:lstStyle/>
+          <a:p>
+            <a:pPr algn="l" marL="342900" indent="-342900">
+              <a:lnSpc>
+                <a:spcPts val="1620"/>
+              </a:lnSpc>
+              <a:spcAft>
+                <a:spcPts val="300"/>
+              </a:spcAft>
+              <a:buSzPct val="100000"/>
+              <a:buChar char="•"/>
+            </a:pPr>
+            <a:r>
+              <a:rPr lang="en-US" sz="1200" dirty="0">
+                <a:solidFill>
+                  <a:srgbClr val="1C2833"/>
+                </a:solidFill>
+                <a:latin typeface="Arial" pitchFamily="34" charset="0"/>
+                <a:ea typeface="Arial" pitchFamily="34" charset="-122"/>
+                <a:cs typeface="Arial" pitchFamily="34" charset="-120"/>
+              </a:rPr>
+              <a:t>Don't push students to "find their type." The framework is interesting; over-typing is not.</a:t>
+            </a:r>
+            <a:endParaRPr lang="en-US" sz="1200" dirty="0"/>
+          </a:p>
+          <a:p>
+            <a:pPr algn="l" marL="342900" indent="-342900">
+              <a:lnSpc>
+                <a:spcPts val="1620"/>
+              </a:lnSpc>
+              <a:spcAft>
+                <a:spcPts val="300"/>
+              </a:spcAft>
+              <a:buSzPct val="100000"/>
+              <a:buChar char="•"/>
+            </a:pPr>
+            <a:r>
+              <a:rPr lang="en-US" sz="1200" dirty="0">
+                <a:solidFill>
+                  <a:srgbClr val="1C2833"/>
+                </a:solidFill>
+                <a:latin typeface="Arial" pitchFamily="34" charset="0"/>
+                <a:ea typeface="Arial" pitchFamily="34" charset="-122"/>
+                <a:cs typeface="Arial" pitchFamily="34" charset="-120"/>
+              </a:rPr>
+              <a:t>The "everyone has all three" point is critical. Resist the pop-Ayurveda "you ARE Vāta" framing.</a:t>
+            </a:r>
+            <a:endParaRPr lang="en-US" sz="1200" dirty="0"/>
+          </a:p>
+        </p:txBody>
+      </p:sp>
+      <p:sp>
+        <p:nvSpPr>
+          <p:cNvPr id="5" name="Text 3"/>
+          <p:cNvSpPr/>
+          <p:nvPr/>
+        </p:nvSpPr>
+        <p:spPr>
+          <a:xfrm>
+            <a:off x="406301" y="4434929"/>
+            <a:ext cx="8498026" cy="213271"/>
+          </a:xfrm>
+          <a:prstGeom prst="rect">
+            <a:avLst/>
+          </a:prstGeom>
+          <a:noFill/>
+          <a:ln/>
+        </p:spPr>
+        <p:txBody>
+          <a:bodyPr wrap="square" lIns="0" tIns="0" rIns="0" bIns="0" rtlCol="0" anchor="t"/>
+          <a:lstStyle/>
+          <a:p>
+            <a:pPr algn="l" indent="0" marL="0">
+              <a:lnSpc>
+                <a:spcPts val="1680"/>
+              </a:lnSpc>
+              <a:spcBef>
+                <a:spcPts val="300"/>
+              </a:spcBef>
+              <a:spcAft>
+                <a:spcPts val="300"/>
+              </a:spcAft>
+              <a:buNone/>
+            </a:pPr>
+            <a:r>
+              <a:rPr lang="en-US" sz="1200" dirty="0">
+                <a:solidFill>
+                  <a:srgbClr val="1C2833"/>
+                </a:solidFill>
+                <a:latin typeface="Arial" pitchFamily="34" charset="0"/>
+                <a:ea typeface="Arial" pitchFamily="34" charset="-122"/>
+                <a:cs typeface="Arial" pitchFamily="34" charset="-120"/>
+              </a:rPr>
+              <a:t>Middle ·  · IKS Curriculum</a:t>
+            </a:r>
+            <a:endParaRPr lang="en-US" sz="1200" dirty="0"/>
+          </a:p>
+        </p:txBody>
+      </p:sp>
+    </p:spTree>
+  </p:cSld>
+  <p:clrMapOvr>
+    <a:masterClrMapping/>
+  </p:clrMapOvr>
+</p:sld>
+</file>
+
+<file path=ppt/slides/slide16.xml><?xml version="1.0" encoding="utf-8"?>
+<p:sld xmlns:a="http://schemas.openxmlformats.org/drawingml/2006/main" xmlns:r="http://schemas.openxmlformats.org/officeDocument/2006/relationships" xmlns:p="http://schemas.openxmlformats.org/presentationml/2006/main">
+  <p:cSld name="Slide 16">
+    <p:bg>
+      <p:bgPr>
+        <a:solidFill>
+          <a:srgbClr val="FFFFFF"/>
+        </a:solidFill>
+      </p:bgPr>
+    </p:bg>
+    <p:spTree>
+      <p:nvGrpSpPr>
+        <p:cNvPr id="1" name=""/>
+        <p:cNvGrpSpPr/>
+        <p:nvPr/>
+      </p:nvGrpSpPr>
+      <p:grpSpPr>
+        <a:xfrm>
+          <a:off x="0" y="0"/>
+          <a:ext cx="0" cy="0"/>
+          <a:chOff x="0" y="0"/>
+          <a:chExt cx="0" cy="0"/>
+        </a:xfrm>
+      </p:grpSpPr>
+      <p:sp>
+        <p:nvSpPr>
+          <p:cNvPr id="2" name="Text 0"/>
+          <p:cNvSpPr/>
+          <p:nvPr/>
+        </p:nvSpPr>
+        <p:spPr>
+          <a:xfrm>
+            <a:off x="0" y="0"/>
+            <a:ext cx="9144000" cy="101501"/>
+          </a:xfrm>
+          <a:prstGeom prst="rect">
+            <a:avLst/>
+          </a:prstGeom>
+          <a:solidFill>
+            <a:srgbClr val="277884"/>
+          </a:solidFill>
+          <a:ln/>
+        </p:spPr>
+        <p:txBody>
+          <a:bodyPr wrap="square" rtlCol="0" anchor="ctr"/>
+          <a:lstStyle/>
+          <a:p>
+            <a:pPr indent="0" marL="0">
+              <a:buNone/>
+            </a:pPr>
+            <a:endParaRPr lang="en-US" dirty="0"/>
+          </a:p>
+        </p:txBody>
+      </p:sp>
+      <p:sp>
+        <p:nvSpPr>
+          <p:cNvPr id="3" name="Text 1"/>
+          <p:cNvSpPr/>
+          <p:nvPr/>
+        </p:nvSpPr>
+        <p:spPr>
+          <a:xfrm>
+            <a:off x="406301" y="457051"/>
+            <a:ext cx="8498026" cy="274290"/>
+          </a:xfrm>
+          <a:prstGeom prst="rect">
+            <a:avLst/>
+          </a:prstGeom>
+          <a:noFill/>
+          <a:ln/>
+        </p:spPr>
+        <p:txBody>
+          <a:bodyPr wrap="square" lIns="0" tIns="0" rIns="0" bIns="0" rtlCol="0" anchor="t"/>
+          <a:lstStyle/>
+          <a:p>
+            <a:pPr algn="l" indent="0" marL="0">
+              <a:lnSpc>
+                <a:spcPts val="2160"/>
+              </a:lnSpc>
+              <a:spcBef>
+                <a:spcPts val="600"/>
+              </a:spcBef>
+              <a:spcAft>
+                <a:spcPts val="800"/>
+              </a:spcAft>
+              <a:buNone/>
+            </a:pPr>
+            <a:r>
+              <a:rPr lang="en-US" sz="1800" b="1" dirty="0">
+                <a:solidFill>
+                  <a:srgbClr val="FE4447"/>
+                </a:solidFill>
+                <a:latin typeface="Georgia" pitchFamily="34" charset="0"/>
+                <a:ea typeface="Georgia" pitchFamily="34" charset="-122"/>
+                <a:cs typeface="Georgia" pitchFamily="34" charset="-120"/>
+              </a:rPr>
+              <a:t>Citation(s) used</a:t>
+            </a:r>
+            <a:endParaRPr lang="en-US" sz="1800" dirty="0"/>
+          </a:p>
+        </p:txBody>
+      </p:sp>
+      <p:sp>
+        <p:nvSpPr>
+          <p:cNvPr id="4" name="Text 2"/>
+          <p:cNvSpPr/>
+          <p:nvPr/>
+        </p:nvSpPr>
+        <p:spPr>
+          <a:xfrm>
+            <a:off x="634901" y="883593"/>
+            <a:ext cx="8102798" cy="544711"/>
+          </a:xfrm>
+          <a:prstGeom prst="rect">
+            <a:avLst/>
+          </a:prstGeom>
+          <a:noFill/>
+          <a:ln/>
+        </p:spPr>
+        <p:txBody>
+          <a:bodyPr wrap="square" lIns="0" tIns="0" rIns="0" bIns="0" rtlCol="0" anchor="t"/>
+          <a:lstStyle/>
+          <a:p>
+            <a:pPr algn="l" marL="342900" indent="-342900">
+              <a:lnSpc>
+                <a:spcPts val="1620"/>
+              </a:lnSpc>
+              <a:spcAft>
+                <a:spcPts val="300"/>
+              </a:spcAft>
+              <a:buSzPct val="100000"/>
+              <a:buChar char="•"/>
+            </a:pPr>
+            <a:r>
+              <a:rPr lang="en-US" sz="1200" dirty="0">
+                <a:solidFill>
+                  <a:srgbClr val="1C2833"/>
+                </a:solidFill>
+                <a:latin typeface="Arial" pitchFamily="34" charset="0"/>
+                <a:ea typeface="Arial" pitchFamily="34" charset="-122"/>
+                <a:cs typeface="Arial" pitchFamily="34" charset="-120"/>
+              </a:rPr>
+              <a:t>vidya-karana RAG cache </a:t>
+            </a:r>
+            <a:pPr algn="l" indent="0" marL="0">
+              <a:lnSpc>
+                <a:spcPts val="1620"/>
+              </a:lnSpc>
+              <a:spcAft>
+                <a:spcPts val="300"/>
+              </a:spcAft>
+              <a:buNone/>
+            </a:pPr>
+            <a:r>
+              <a:rPr lang="en-US" sz="1200" dirty="0">
+                <a:solidFill>
+                  <a:srgbClr val="1C2833"/>
+                </a:solidFill>
+                <a:latin typeface="Arial" pitchFamily="34" charset="0"/>
+                <a:ea typeface="Arial" pitchFamily="34" charset="-122"/>
+                <a:cs typeface="Arial" pitchFamily="34" charset="-120"/>
+              </a:rPr>
+              <a:t>day-02-tridosha.json</a:t>
+            </a:r>
+            <a:pPr algn="l" indent="0" marL="0">
+              <a:lnSpc>
+                <a:spcPts val="1620"/>
+              </a:lnSpc>
+              <a:spcAft>
+                <a:spcPts val="300"/>
+              </a:spcAft>
+              <a:buNone/>
+            </a:pPr>
+            <a:r>
+              <a:rPr lang="en-US" sz="1200" dirty="0">
+                <a:solidFill>
+                  <a:srgbClr val="1C2833"/>
+                </a:solidFill>
+                <a:latin typeface="Arial" pitchFamily="34" charset="0"/>
+                <a:ea typeface="Arial" pitchFamily="34" charset="-122"/>
+                <a:cs typeface="Arial" pitchFamily="34" charset="-120"/>
+              </a:rPr>
+              <a:t>.</a:t>
+            </a:r>
+            <a:endParaRPr lang="en-US" sz="1200" dirty="0"/>
+          </a:p>
+          <a:p>
+            <a:pPr algn="l" marL="342900" indent="-342900">
+              <a:lnSpc>
+                <a:spcPts val="1620"/>
+              </a:lnSpc>
+              <a:spcAft>
+                <a:spcPts val="300"/>
+              </a:spcAft>
+              <a:buSzPct val="100000"/>
+              <a:buChar char="•"/>
+            </a:pPr>
+            <a:r>
+              <a:rPr lang="en-US" sz="1200" dirty="0">
+                <a:solidFill>
+                  <a:srgbClr val="1C2833"/>
+                </a:solidFill>
+                <a:latin typeface="Arial" pitchFamily="34" charset="0"/>
+                <a:ea typeface="Arial" pitchFamily="34" charset="-122"/>
+                <a:cs typeface="Arial" pitchFamily="34" charset="-120"/>
+              </a:rPr>
+              <a:t>Wujastyk (2003) for classical Tridosha exposition.</a:t>
+            </a:r>
+            <a:endParaRPr lang="en-US" sz="1200" dirty="0"/>
+          </a:p>
+        </p:txBody>
+      </p:sp>
+      <p:sp>
+        <p:nvSpPr>
+          <p:cNvPr id="5" name="Text 3"/>
           <p:cNvSpPr/>
           <p:nvPr/>
         </p:nvSpPr>
@@ -3060,7 +4338,7 @@
                 <a:ea typeface="Georgia" pitchFamily="34" charset="-122"/>
                 <a:cs typeface="Georgia" pitchFamily="34" charset="-120"/>
               </a:rPr>
-              <a:t>Materials</a:t>
+              <a:t>Learning objective</a:t>
             </a:r>
             <a:endParaRPr lang="en-US" sz="1800" dirty="0"/>
           </a:p>
@@ -3108,7 +4386,7 @@
                 <a:ea typeface="Arial" pitchFamily="34" charset="-122"/>
                 <a:cs typeface="Arial" pitchFamily="34" charset="-120"/>
               </a:rPr>
-              <a:t>– Wall chart of the 3 doshas – Whiteboard</a:t>
+              <a:t>Students name the three doshas, their elemental basis, characteristic qualities, and one observable sign of each.</a:t>
             </a:r>
             <a:endParaRPr lang="en-US" sz="1200" dirty="0"/>
           </a:p>
@@ -3266,7 +4544,7 @@
                 <a:ea typeface="Georgia" pitchFamily="34" charset="-122"/>
                 <a:cs typeface="Georgia" pitchFamily="34" charset="-120"/>
               </a:rPr>
-              <a:t>Vocabulary</a:t>
+              <a:t>Materials</a:t>
             </a:r>
             <a:endParaRPr lang="en-US" sz="1800" dirty="0"/>
           </a:p>
@@ -3281,7 +4559,7 @@
         <p:spPr>
           <a:xfrm>
             <a:off x="634901" y="883593"/>
-            <a:ext cx="8102798" cy="1013222"/>
+            <a:ext cx="8102798" cy="525661"/>
           </a:xfrm>
           <a:prstGeom prst="rect">
             <a:avLst/>
@@ -3304,26 +4582,6 @@
               <a:buChar char="•"/>
             </a:pPr>
             <a:r>
-              <a:rPr lang="en-US" sz="1200" i="1" dirty="0">
-                <a:solidFill>
-                  <a:srgbClr val="1C2833"/>
-                </a:solidFill>
-                <a:latin typeface="Arial" pitchFamily="34" charset="0"/>
-                <a:ea typeface="Arial" pitchFamily="34" charset="-122"/>
-                <a:cs typeface="Arial" pitchFamily="34" charset="-120"/>
-              </a:rPr>
-              <a:t>dosha</a:t>
-            </a:r>
-            <a:pPr algn="l" indent="0" marL="0">
-              <a:lnSpc>
-                <a:spcPts val="1620"/>
-              </a:lnSpc>
-              <a:spcAft>
-                <a:spcPts val="300"/>
-              </a:spcAft>
-              <a:buNone/>
-            </a:pPr>
-            <a:r>
               <a:rPr lang="en-US" sz="1200" dirty="0">
                 <a:solidFill>
                   <a:srgbClr val="1C2833"/>
@@ -3332,7 +4590,7 @@
                 <a:ea typeface="Arial" pitchFamily="34" charset="-122"/>
                 <a:cs typeface="Arial" pitchFamily="34" charset="-120"/>
               </a:rPr>
-              <a:t> — humour, biological energy</a:t>
+              <a:t>Wall chart of the 3 doshas</a:t>
             </a:r>
             <a:endParaRPr lang="en-US" sz="1200" dirty="0"/>
           </a:p>
@@ -3348,26 +4606,6 @@
               <a:buChar char="•"/>
             </a:pPr>
             <a:r>
-              <a:rPr lang="en-US" sz="1200" i="1" dirty="0">
-                <a:solidFill>
-                  <a:srgbClr val="1C2833"/>
-                </a:solidFill>
-                <a:latin typeface="Arial" pitchFamily="34" charset="0"/>
-                <a:ea typeface="Arial" pitchFamily="34" charset="-122"/>
-                <a:cs typeface="Arial" pitchFamily="34" charset="-120"/>
-              </a:rPr>
-              <a:t>Vāta</a:t>
-            </a:r>
-            <a:pPr algn="l" indent="0" marL="0">
-              <a:lnSpc>
-                <a:spcPts val="1620"/>
-              </a:lnSpc>
-              <a:spcAft>
-                <a:spcPts val="300"/>
-              </a:spcAft>
-              <a:buNone/>
-            </a:pPr>
-            <a:r>
               <a:rPr lang="en-US" sz="1200" dirty="0">
                 <a:solidFill>
                   <a:srgbClr val="1C2833"/>
@@ -3376,95 +4614,7 @@
                 <a:ea typeface="Arial" pitchFamily="34" charset="-122"/>
                 <a:cs typeface="Arial" pitchFamily="34" charset="-120"/>
               </a:rPr>
-              <a:t> — wind/space dosha</a:t>
-            </a:r>
-            <a:endParaRPr lang="en-US" sz="1200" dirty="0"/>
-          </a:p>
-          <a:p>
-            <a:pPr algn="l" marL="342900" indent="-342900">
-              <a:lnSpc>
-                <a:spcPts val="1620"/>
-              </a:lnSpc>
-              <a:spcAft>
-                <a:spcPts val="300"/>
-              </a:spcAft>
-              <a:buSzPct val="100000"/>
-              <a:buChar char="•"/>
-            </a:pPr>
-            <a:r>
-              <a:rPr lang="en-US" sz="1200" i="1" dirty="0">
-                <a:solidFill>
-                  <a:srgbClr val="1C2833"/>
-                </a:solidFill>
-                <a:latin typeface="Arial" pitchFamily="34" charset="0"/>
-                <a:ea typeface="Arial" pitchFamily="34" charset="-122"/>
-                <a:cs typeface="Arial" pitchFamily="34" charset="-120"/>
-              </a:rPr>
-              <a:t>Pitta</a:t>
-            </a:r>
-            <a:pPr algn="l" indent="0" marL="0">
-              <a:lnSpc>
-                <a:spcPts val="1620"/>
-              </a:lnSpc>
-              <a:spcAft>
-                <a:spcPts val="300"/>
-              </a:spcAft>
-              <a:buNone/>
-            </a:pPr>
-            <a:r>
-              <a:rPr lang="en-US" sz="1200" dirty="0">
-                <a:solidFill>
-                  <a:srgbClr val="1C2833"/>
-                </a:solidFill>
-                <a:latin typeface="Arial" pitchFamily="34" charset="0"/>
-                <a:ea typeface="Arial" pitchFamily="34" charset="-122"/>
-                <a:cs typeface="Arial" pitchFamily="34" charset="-120"/>
-              </a:rPr>
-              <a:t> — fire/water dosha</a:t>
-            </a:r>
-            <a:endParaRPr lang="en-US" sz="1200" dirty="0"/>
-          </a:p>
-          <a:p>
-            <a:pPr algn="l" marL="342900" indent="-342900">
-              <a:lnSpc>
-                <a:spcPts val="1620"/>
-              </a:lnSpc>
-              <a:spcAft>
-                <a:spcPts val="300"/>
-              </a:spcAft>
-              <a:buSzPct val="100000"/>
-              <a:buChar char="•"/>
-            </a:pPr>
-            <a:r>
-              <a:rPr lang="en-US" sz="1200" i="1" dirty="0">
-                <a:solidFill>
-                  <a:srgbClr val="1C2833"/>
-                </a:solidFill>
-                <a:latin typeface="Arial" pitchFamily="34" charset="0"/>
-                <a:ea typeface="Arial" pitchFamily="34" charset="-122"/>
-                <a:cs typeface="Arial" pitchFamily="34" charset="-120"/>
-              </a:rPr>
-              <a:t>Kapha</a:t>
-            </a:r>
-            <a:pPr algn="l" indent="0" marL="0">
-              <a:lnSpc>
-                <a:spcPts val="1620"/>
-              </a:lnSpc>
-              <a:spcAft>
-                <a:spcPts val="300"/>
-              </a:spcAft>
-              <a:buNone/>
-            </a:pPr>
-            <a:r>
-              <a:rPr lang="en-US" sz="1200" dirty="0">
-                <a:solidFill>
-                  <a:srgbClr val="1C2833"/>
-                </a:solidFill>
-                <a:latin typeface="Arial" pitchFamily="34" charset="0"/>
-                <a:ea typeface="Arial" pitchFamily="34" charset="-122"/>
-                <a:cs typeface="Arial" pitchFamily="34" charset="-120"/>
-              </a:rPr>
-              <a:t> — water/earth dosha</a:t>
+              <a:t>Whiteboard</a:t>
             </a:r>
             <a:endParaRPr lang="en-US" sz="1200" dirty="0"/>
           </a:p>
@@ -3622,7 +4772,7 @@
                 <a:ea typeface="Georgia" pitchFamily="34" charset="-122"/>
                 <a:cs typeface="Georgia" pitchFamily="34" charset="-120"/>
               </a:rPr>
-              <a:t>Flow</a:t>
+              <a:t>Vocabulary</a:t>
             </a:r>
             <a:endParaRPr lang="en-US" sz="1800" dirty="0"/>
           </a:p>
@@ -3631,6 +4781,204 @@
       <p:sp>
         <p:nvSpPr>
           <p:cNvPr id="4" name="Text 2"/>
+          <p:cNvSpPr/>
+          <p:nvPr/>
+        </p:nvSpPr>
+        <p:spPr>
+          <a:xfrm>
+            <a:off x="634901" y="883593"/>
+            <a:ext cx="8102798" cy="1013222"/>
+          </a:xfrm>
+          <a:prstGeom prst="rect">
+            <a:avLst/>
+          </a:prstGeom>
+          <a:noFill/>
+          <a:ln/>
+        </p:spPr>
+        <p:txBody>
+          <a:bodyPr wrap="square" lIns="0" tIns="0" rIns="0" bIns="0" rtlCol="0" anchor="t"/>
+          <a:lstStyle/>
+          <a:p>
+            <a:pPr algn="l" marL="342900" indent="-342900">
+              <a:lnSpc>
+                <a:spcPts val="1620"/>
+              </a:lnSpc>
+              <a:spcAft>
+                <a:spcPts val="300"/>
+              </a:spcAft>
+              <a:buSzPct val="100000"/>
+              <a:buChar char="•"/>
+            </a:pPr>
+            <a:r>
+              <a:rPr lang="en-US" sz="1200" i="1" dirty="0">
+                <a:solidFill>
+                  <a:srgbClr val="1C2833"/>
+                </a:solidFill>
+                <a:latin typeface="Arial" pitchFamily="34" charset="0"/>
+                <a:ea typeface="Arial" pitchFamily="34" charset="-122"/>
+                <a:cs typeface="Arial" pitchFamily="34" charset="-120"/>
+              </a:rPr>
+              <a:t>dosha</a:t>
+            </a:r>
+            <a:pPr algn="l" indent="0" marL="0">
+              <a:lnSpc>
+                <a:spcPts val="1620"/>
+              </a:lnSpc>
+              <a:spcAft>
+                <a:spcPts val="300"/>
+              </a:spcAft>
+              <a:buNone/>
+            </a:pPr>
+            <a:r>
+              <a:rPr lang="en-US" sz="1200" dirty="0">
+                <a:solidFill>
+                  <a:srgbClr val="1C2833"/>
+                </a:solidFill>
+                <a:latin typeface="Arial" pitchFamily="34" charset="0"/>
+                <a:ea typeface="Arial" pitchFamily="34" charset="-122"/>
+                <a:cs typeface="Arial" pitchFamily="34" charset="-120"/>
+              </a:rPr>
+              <a:t> — humour, biological energy</a:t>
+            </a:r>
+            <a:endParaRPr lang="en-US" sz="1200" dirty="0"/>
+          </a:p>
+          <a:p>
+            <a:pPr algn="l" marL="342900" indent="-342900">
+              <a:lnSpc>
+                <a:spcPts val="1620"/>
+              </a:lnSpc>
+              <a:spcAft>
+                <a:spcPts val="300"/>
+              </a:spcAft>
+              <a:buSzPct val="100000"/>
+              <a:buChar char="•"/>
+            </a:pPr>
+            <a:r>
+              <a:rPr lang="en-US" sz="1200" i="1" dirty="0">
+                <a:solidFill>
+                  <a:srgbClr val="1C2833"/>
+                </a:solidFill>
+                <a:latin typeface="Arial" pitchFamily="34" charset="0"/>
+                <a:ea typeface="Arial" pitchFamily="34" charset="-122"/>
+                <a:cs typeface="Arial" pitchFamily="34" charset="-120"/>
+              </a:rPr>
+              <a:t>Vāta</a:t>
+            </a:r>
+            <a:pPr algn="l" indent="0" marL="0">
+              <a:lnSpc>
+                <a:spcPts val="1620"/>
+              </a:lnSpc>
+              <a:spcAft>
+                <a:spcPts val="300"/>
+              </a:spcAft>
+              <a:buNone/>
+            </a:pPr>
+            <a:r>
+              <a:rPr lang="en-US" sz="1200" dirty="0">
+                <a:solidFill>
+                  <a:srgbClr val="1C2833"/>
+                </a:solidFill>
+                <a:latin typeface="Arial" pitchFamily="34" charset="0"/>
+                <a:ea typeface="Arial" pitchFamily="34" charset="-122"/>
+                <a:cs typeface="Arial" pitchFamily="34" charset="-120"/>
+              </a:rPr>
+              <a:t> — wind/space dosha</a:t>
+            </a:r>
+            <a:endParaRPr lang="en-US" sz="1200" dirty="0"/>
+          </a:p>
+          <a:p>
+            <a:pPr algn="l" marL="342900" indent="-342900">
+              <a:lnSpc>
+                <a:spcPts val="1620"/>
+              </a:lnSpc>
+              <a:spcAft>
+                <a:spcPts val="300"/>
+              </a:spcAft>
+              <a:buSzPct val="100000"/>
+              <a:buChar char="•"/>
+            </a:pPr>
+            <a:r>
+              <a:rPr lang="en-US" sz="1200" i="1" dirty="0">
+                <a:solidFill>
+                  <a:srgbClr val="1C2833"/>
+                </a:solidFill>
+                <a:latin typeface="Arial" pitchFamily="34" charset="0"/>
+                <a:ea typeface="Arial" pitchFamily="34" charset="-122"/>
+                <a:cs typeface="Arial" pitchFamily="34" charset="-120"/>
+              </a:rPr>
+              <a:t>Pitta</a:t>
+            </a:r>
+            <a:pPr algn="l" indent="0" marL="0">
+              <a:lnSpc>
+                <a:spcPts val="1620"/>
+              </a:lnSpc>
+              <a:spcAft>
+                <a:spcPts val="300"/>
+              </a:spcAft>
+              <a:buNone/>
+            </a:pPr>
+            <a:r>
+              <a:rPr lang="en-US" sz="1200" dirty="0">
+                <a:solidFill>
+                  <a:srgbClr val="1C2833"/>
+                </a:solidFill>
+                <a:latin typeface="Arial" pitchFamily="34" charset="0"/>
+                <a:ea typeface="Arial" pitchFamily="34" charset="-122"/>
+                <a:cs typeface="Arial" pitchFamily="34" charset="-120"/>
+              </a:rPr>
+              <a:t> — fire/water dosha</a:t>
+            </a:r>
+            <a:endParaRPr lang="en-US" sz="1200" dirty="0"/>
+          </a:p>
+          <a:p>
+            <a:pPr algn="l" marL="342900" indent="-342900">
+              <a:lnSpc>
+                <a:spcPts val="1620"/>
+              </a:lnSpc>
+              <a:spcAft>
+                <a:spcPts val="300"/>
+              </a:spcAft>
+              <a:buSzPct val="100000"/>
+              <a:buChar char="•"/>
+            </a:pPr>
+            <a:r>
+              <a:rPr lang="en-US" sz="1200" i="1" dirty="0">
+                <a:solidFill>
+                  <a:srgbClr val="1C2833"/>
+                </a:solidFill>
+                <a:latin typeface="Arial" pitchFamily="34" charset="0"/>
+                <a:ea typeface="Arial" pitchFamily="34" charset="-122"/>
+                <a:cs typeface="Arial" pitchFamily="34" charset="-120"/>
+              </a:rPr>
+              <a:t>Kapha</a:t>
+            </a:r>
+            <a:pPr algn="l" indent="0" marL="0">
+              <a:lnSpc>
+                <a:spcPts val="1620"/>
+              </a:lnSpc>
+              <a:spcAft>
+                <a:spcPts val="300"/>
+              </a:spcAft>
+              <a:buNone/>
+            </a:pPr>
+            <a:r>
+              <a:rPr lang="en-US" sz="1200" dirty="0">
+                <a:solidFill>
+                  <a:srgbClr val="1C2833"/>
+                </a:solidFill>
+                <a:latin typeface="Arial" pitchFamily="34" charset="0"/>
+                <a:ea typeface="Arial" pitchFamily="34" charset="-122"/>
+                <a:cs typeface="Arial" pitchFamily="34" charset="-120"/>
+              </a:rPr>
+              <a:t> — water/earth dosha</a:t>
+            </a:r>
+            <a:endParaRPr lang="en-US" sz="1200" dirty="0"/>
+          </a:p>
+        </p:txBody>
+      </p:sp>
+      <p:sp>
+        <p:nvSpPr>
+          <p:cNvPr id="5" name="Text 3"/>
           <p:cNvSpPr/>
           <p:nvPr/>
         </p:nvSpPr>
@@ -3780,7 +5128,7 @@
                 <a:ea typeface="Georgia" pitchFamily="34" charset="-122"/>
                 <a:cs typeface="Georgia" pitchFamily="34" charset="-120"/>
               </a:rPr>
-              <a:t>Warm-up (5 min)</a:t>
+              <a:t>Flow</a:t>
             </a:r>
             <a:endParaRPr lang="en-US" sz="1800" dirty="0"/>
           </a:p>
@@ -3789,54 +5137,6 @@
       <p:sp>
         <p:nvSpPr>
           <p:cNvPr id="4" name="Text 2"/>
-          <p:cNvSpPr/>
-          <p:nvPr/>
-        </p:nvSpPr>
-        <p:spPr>
-          <a:xfrm>
-            <a:off x="406301" y="870942"/>
-            <a:ext cx="8498026" cy="213271"/>
-          </a:xfrm>
-          <a:prstGeom prst="rect">
-            <a:avLst/>
-          </a:prstGeom>
-          <a:noFill/>
-          <a:ln/>
-        </p:spPr>
-        <p:txBody>
-          <a:bodyPr wrap="square" lIns="0" tIns="0" rIns="0" bIns="0" rtlCol="0" anchor="t"/>
-          <a:lstStyle/>
-          <a:p>
-            <a:pPr algn="l" indent="0" marL="0">
-              <a:lnSpc>
-                <a:spcPts val="1680"/>
-              </a:lnSpc>
-              <a:spcBef>
-                <a:spcPts val="300"/>
-              </a:spcBef>
-              <a:spcAft>
-                <a:spcPts val="300"/>
-              </a:spcAft>
-              <a:buNone/>
-            </a:pPr>
-            <a:r>
-              <a:rPr lang="en-US" sz="1200" dirty="0">
-                <a:solidFill>
-                  <a:srgbClr val="1C2833"/>
-                </a:solidFill>
-                <a:latin typeface="Arial" pitchFamily="34" charset="0"/>
-                <a:ea typeface="Arial" pitchFamily="34" charset="-122"/>
-                <a:cs typeface="Arial" pitchFamily="34" charset="-120"/>
-              </a:rPr>
-              <a:t>Daily prompt + recall: define Āyurveda and Swasthya.</a:t>
-            </a:r>
-            <a:endParaRPr lang="en-US" sz="1200" dirty="0"/>
-          </a:p>
-        </p:txBody>
-      </p:sp>
-      <p:sp>
-        <p:nvSpPr>
-          <p:cNvPr id="5" name="Text 3"/>
           <p:cNvSpPr/>
           <p:nvPr/>
         </p:nvSpPr>
@@ -3986,7 +5286,7 @@
                 <a:ea typeface="Georgia" pitchFamily="34" charset="-122"/>
                 <a:cs typeface="Georgia" pitchFamily="34" charset="-120"/>
               </a:rPr>
-              <a:t>Core (25 min)</a:t>
+              <a:t>Warm-up (5 min)</a:t>
             </a:r>
             <a:endParaRPr lang="en-US" sz="1800" dirty="0"/>
           </a:p>
@@ -4000,8 +5300,8 @@
         </p:nvSpPr>
         <p:spPr>
           <a:xfrm>
-            <a:off x="634901" y="883593"/>
-            <a:ext cx="8102798" cy="281880"/>
+            <a:off x="406301" y="870942"/>
+            <a:ext cx="8498026" cy="213271"/>
           </a:xfrm>
           <a:prstGeom prst="rect">
             <a:avLst/>
@@ -4013,26 +5313,28 @@
           <a:bodyPr wrap="square" lIns="0" tIns="0" rIns="0" bIns="0" rtlCol="0" anchor="t"/>
           <a:lstStyle/>
           <a:p>
-            <a:pPr algn="l" marL="342900" indent="-342900">
-              <a:lnSpc>
-                <a:spcPts val="1620"/>
-              </a:lnSpc>
-              <a:spcAft>
-                <a:spcPts val="300"/>
-              </a:spcAft>
-              <a:buSzPct val="100000"/>
-              <a:buChar char="•"/>
-            </a:pPr>
-            <a:r>
-              <a:rPr lang="en-US" sz="1200" b="1" dirty="0">
-                <a:solidFill>
-                  <a:srgbClr val="1C2833"/>
-                </a:solidFill>
-                <a:latin typeface="Arial" pitchFamily="34" charset="0"/>
-                <a:ea typeface="Arial" pitchFamily="34" charset="-122"/>
-                <a:cs typeface="Arial" pitchFamily="34" charset="-120"/>
-              </a:rPr>
-              <a:t>Build the dosha table on the board:</a:t>
+            <a:pPr algn="l" indent="0" marL="0">
+              <a:lnSpc>
+                <a:spcPts val="1680"/>
+              </a:lnSpc>
+              <a:spcBef>
+                <a:spcPts val="300"/>
+              </a:spcBef>
+              <a:spcAft>
+                <a:spcPts val="300"/>
+              </a:spcAft>
+              <a:buNone/>
+            </a:pPr>
+            <a:r>
+              <a:rPr lang="en-US" sz="1200" dirty="0">
+                <a:solidFill>
+                  <a:srgbClr val="1C2833"/>
+                </a:solidFill>
+                <a:latin typeface="Arial" pitchFamily="34" charset="0"/>
+                <a:ea typeface="Arial" pitchFamily="34" charset="-122"/>
+                <a:cs typeface="Arial" pitchFamily="34" charset="-120"/>
+              </a:rPr>
+              <a:t>Daily prompt + recall: define Āyurveda and Swasthya.</a:t>
             </a:r>
             <a:endParaRPr lang="en-US" sz="1200" dirty="0"/>
           </a:p>
@@ -4046,641 +5348,7 @@
         </p:nvSpPr>
         <p:spPr>
           <a:xfrm>
-            <a:off x="406301" y="1254323"/>
-            <a:ext cx="8498026" cy="213271"/>
-          </a:xfrm>
-          <a:prstGeom prst="rect">
-            <a:avLst/>
-          </a:prstGeom>
-          <a:noFill/>
-          <a:ln/>
-        </p:spPr>
-        <p:txBody>
-          <a:bodyPr wrap="square" lIns="0" tIns="0" rIns="0" bIns="0" rtlCol="0" anchor="t"/>
-          <a:lstStyle/>
-          <a:p>
-            <a:pPr algn="l" indent="0" marL="0">
-              <a:lnSpc>
-                <a:spcPts val="1680"/>
-              </a:lnSpc>
-              <a:spcBef>
-                <a:spcPts val="300"/>
-              </a:spcBef>
-              <a:spcAft>
-                <a:spcPts val="300"/>
-              </a:spcAft>
-              <a:buNone/>
-            </a:pPr>
-            <a:r>
-              <a:rPr lang="en-US" sz="1200" i="1" dirty="0">
-                <a:solidFill>
-                  <a:srgbClr val="1C2833"/>
-                </a:solidFill>
-                <a:latin typeface="Arial" pitchFamily="34" charset="0"/>
-                <a:ea typeface="Arial" pitchFamily="34" charset="-122"/>
-                <a:cs typeface="Arial" pitchFamily="34" charset="-120"/>
-              </a:rPr>
-              <a:t>Each row: Dosha · Elements · Qualities · Function · When out of balance.</a:t>
-            </a:r>
-            <a:endParaRPr lang="en-US" sz="1200" dirty="0"/>
-          </a:p>
-        </p:txBody>
-      </p:sp>
-      <p:sp>
-        <p:nvSpPr>
-          <p:cNvPr id="6" name="Text 4"/>
-          <p:cNvSpPr/>
-          <p:nvPr/>
-        </p:nvSpPr>
-        <p:spPr>
-          <a:xfrm>
-            <a:off x="634901" y="1556445"/>
-            <a:ext cx="8102798" cy="1386483"/>
-          </a:xfrm>
-          <a:prstGeom prst="rect">
-            <a:avLst/>
-          </a:prstGeom>
-          <a:noFill/>
-          <a:ln/>
-        </p:spPr>
-        <p:txBody>
-          <a:bodyPr wrap="square" lIns="0" tIns="0" rIns="0" bIns="0" rtlCol="0" anchor="t"/>
-          <a:lstStyle/>
-          <a:p>
-            <a:pPr algn="l" marL="342900" indent="-342900">
-              <a:lnSpc>
-                <a:spcPts val="1620"/>
-              </a:lnSpc>
-              <a:spcAft>
-                <a:spcPts val="300"/>
-              </a:spcAft>
-              <a:buSzPct val="100000"/>
-              <a:buChar char="•"/>
-            </a:pPr>
-            <a:r>
-              <a:rPr lang="en-US" sz="1200" b="1" dirty="0">
-                <a:solidFill>
-                  <a:srgbClr val="1C2833"/>
-                </a:solidFill>
-                <a:latin typeface="Arial" pitchFamily="34" charset="0"/>
-                <a:ea typeface="Arial" pitchFamily="34" charset="-122"/>
-                <a:cs typeface="Arial" pitchFamily="34" charset="-120"/>
-              </a:rPr>
-              <a:t>Vāta</a:t>
-            </a:r>
-            <a:pPr algn="l" indent="0" marL="0">
-              <a:lnSpc>
-                <a:spcPts val="1620"/>
-              </a:lnSpc>
-              <a:spcAft>
-                <a:spcPts val="300"/>
-              </a:spcAft>
-              <a:buNone/>
-            </a:pPr>
-            <a:r>
-              <a:rPr lang="en-US" sz="1200" dirty="0">
-                <a:solidFill>
-                  <a:srgbClr val="1C2833"/>
-                </a:solidFill>
-                <a:latin typeface="Arial" pitchFamily="34" charset="0"/>
-                <a:ea typeface="Arial" pitchFamily="34" charset="-122"/>
-                <a:cs typeface="Arial" pitchFamily="34" charset="-120"/>
-              </a:rPr>
-              <a:t> — air + space · mobile, dry, light, cold, rough · Movement, breath, nervous system · Anxiety, insomnia, dry skin, constipation</a:t>
-            </a:r>
-            <a:endParaRPr lang="en-US" sz="1200" dirty="0"/>
-          </a:p>
-          <a:p>
-            <a:pPr algn="l" marL="342900" indent="-342900">
-              <a:lnSpc>
-                <a:spcPts val="1620"/>
-              </a:lnSpc>
-              <a:spcAft>
-                <a:spcPts val="300"/>
-              </a:spcAft>
-              <a:buSzPct val="100000"/>
-              <a:buChar char="•"/>
-            </a:pPr>
-            <a:r>
-              <a:rPr lang="en-US" sz="1200" b="1" dirty="0">
-                <a:solidFill>
-                  <a:srgbClr val="1C2833"/>
-                </a:solidFill>
-                <a:latin typeface="Arial" pitchFamily="34" charset="0"/>
-                <a:ea typeface="Arial" pitchFamily="34" charset="-122"/>
-                <a:cs typeface="Arial" pitchFamily="34" charset="-120"/>
-              </a:rPr>
-              <a:t>Pitta</a:t>
-            </a:r>
-            <a:pPr algn="l" indent="0" marL="0">
-              <a:lnSpc>
-                <a:spcPts val="1620"/>
-              </a:lnSpc>
-              <a:spcAft>
-                <a:spcPts val="300"/>
-              </a:spcAft>
-              <a:buNone/>
-            </a:pPr>
-            <a:r>
-              <a:rPr lang="en-US" sz="1200" dirty="0">
-                <a:solidFill>
-                  <a:srgbClr val="1C2833"/>
-                </a:solidFill>
-                <a:latin typeface="Arial" pitchFamily="34" charset="0"/>
-                <a:ea typeface="Arial" pitchFamily="34" charset="-122"/>
-                <a:cs typeface="Arial" pitchFamily="34" charset="-120"/>
-              </a:rPr>
-              <a:t> — fire + water · hot, sharp, light, oily, slightly liquid · Digestion, metabolism, vision · Heartburn, irritability, skin inflammation</a:t>
-            </a:r>
-            <a:endParaRPr lang="en-US" sz="1200" dirty="0"/>
-          </a:p>
-          <a:p>
-            <a:pPr algn="l" marL="342900" indent="-342900">
-              <a:lnSpc>
-                <a:spcPts val="1620"/>
-              </a:lnSpc>
-              <a:spcAft>
-                <a:spcPts val="300"/>
-              </a:spcAft>
-              <a:buSzPct val="100000"/>
-              <a:buChar char="•"/>
-            </a:pPr>
-            <a:r>
-              <a:rPr lang="en-US" sz="1200" b="1" dirty="0">
-                <a:solidFill>
-                  <a:srgbClr val="1C2833"/>
-                </a:solidFill>
-                <a:latin typeface="Arial" pitchFamily="34" charset="0"/>
-                <a:ea typeface="Arial" pitchFamily="34" charset="-122"/>
-                <a:cs typeface="Arial" pitchFamily="34" charset="-120"/>
-              </a:rPr>
-              <a:t>Kapha</a:t>
-            </a:r>
-            <a:pPr algn="l" indent="0" marL="0">
-              <a:lnSpc>
-                <a:spcPts val="1620"/>
-              </a:lnSpc>
-              <a:spcAft>
-                <a:spcPts val="300"/>
-              </a:spcAft>
-              <a:buNone/>
-            </a:pPr>
-            <a:r>
-              <a:rPr lang="en-US" sz="1200" dirty="0">
-                <a:solidFill>
-                  <a:srgbClr val="1C2833"/>
-                </a:solidFill>
-                <a:latin typeface="Arial" pitchFamily="34" charset="0"/>
-                <a:ea typeface="Arial" pitchFamily="34" charset="-122"/>
-                <a:cs typeface="Arial" pitchFamily="34" charset="-120"/>
-              </a:rPr>
-              <a:t> — water + earth · heavy, slow, cool, oily, smooth · Structure, immunity, lubrication · Lethargy, congestion, weight gain</a:t>
-            </a:r>
-            <a:endParaRPr lang="en-US" sz="1200" dirty="0"/>
-          </a:p>
-        </p:txBody>
-      </p:sp>
-      <p:sp>
-        <p:nvSpPr>
-          <p:cNvPr id="7" name="Text 5"/>
-          <p:cNvSpPr/>
-          <p:nvPr/>
-        </p:nvSpPr>
-        <p:spPr>
-          <a:xfrm>
-            <a:off x="634901" y="3044428"/>
-            <a:ext cx="8102798" cy="487561"/>
-          </a:xfrm>
-          <a:prstGeom prst="rect">
-            <a:avLst/>
-          </a:prstGeom>
-          <a:noFill/>
-          <a:ln/>
-        </p:spPr>
-        <p:txBody>
-          <a:bodyPr wrap="square" lIns="0" tIns="0" rIns="0" bIns="0" rtlCol="0" anchor="t"/>
-          <a:lstStyle/>
-          <a:p>
-            <a:pPr algn="l" marL="342900" indent="-342900">
-              <a:lnSpc>
-                <a:spcPts val="1620"/>
-              </a:lnSpc>
-              <a:spcAft>
-                <a:spcPts val="300"/>
-              </a:spcAft>
-              <a:buSzPct val="100000"/>
-              <a:buChar char="•"/>
-            </a:pPr>
-            <a:r>
-              <a:rPr lang="en-US" sz="1200" b="1" dirty="0">
-                <a:solidFill>
-                  <a:srgbClr val="1C2833"/>
-                </a:solidFill>
-                <a:latin typeface="Arial" pitchFamily="34" charset="0"/>
-                <a:ea typeface="Arial" pitchFamily="34" charset="-122"/>
-                <a:cs typeface="Arial" pitchFamily="34" charset="-120"/>
-              </a:rPr>
-              <a:t>Note the connection to Module 2.</a:t>
-            </a:r>
-            <a:pPr algn="l" indent="0" marL="0">
-              <a:lnSpc>
-                <a:spcPts val="1620"/>
-              </a:lnSpc>
-              <a:spcAft>
-                <a:spcPts val="300"/>
-              </a:spcAft>
-              <a:buNone/>
-            </a:pPr>
-            <a:r>
-              <a:rPr lang="en-US" sz="1200" dirty="0">
-                <a:solidFill>
-                  <a:srgbClr val="1C2833"/>
-                </a:solidFill>
-                <a:latin typeface="Arial" pitchFamily="34" charset="0"/>
-                <a:ea typeface="Arial" pitchFamily="34" charset="-122"/>
-                <a:cs typeface="Arial" pitchFamily="34" charset="-120"/>
-              </a:rPr>
-              <a:t> The doshas are built from the </a:t>
-            </a:r>
-            <a:pPr algn="l" indent="0" marL="0">
-              <a:lnSpc>
-                <a:spcPts val="1620"/>
-              </a:lnSpc>
-              <a:spcAft>
-                <a:spcPts val="300"/>
-              </a:spcAft>
-              <a:buNone/>
-            </a:pPr>
-            <a:r>
-              <a:rPr lang="en-US" sz="1200" i="1" dirty="0">
-                <a:solidFill>
-                  <a:srgbClr val="1C2833"/>
-                </a:solidFill>
-                <a:latin typeface="Arial" pitchFamily="34" charset="0"/>
-                <a:ea typeface="Arial" pitchFamily="34" charset="-122"/>
-                <a:cs typeface="Arial" pitchFamily="34" charset="-120"/>
-              </a:rPr>
-              <a:t>pañcabhūta</a:t>
-            </a:r>
-            <a:pPr algn="l" indent="0" marL="0">
-              <a:lnSpc>
-                <a:spcPts val="1620"/>
-              </a:lnSpc>
-              <a:spcAft>
-                <a:spcPts val="300"/>
-              </a:spcAft>
-              <a:buNone/>
-            </a:pPr>
-            <a:r>
-              <a:rPr lang="en-US" sz="1200" dirty="0">
-                <a:solidFill>
-                  <a:srgbClr val="1C2833"/>
-                </a:solidFill>
-                <a:latin typeface="Arial" pitchFamily="34" charset="0"/>
-                <a:ea typeface="Arial" pitchFamily="34" charset="-122"/>
-                <a:cs typeface="Arial" pitchFamily="34" charset="-120"/>
-              </a:rPr>
-              <a:t> (five elements). Each dosha is a particular combination of elements + qualities.</a:t>
-            </a:r>
-            <a:endParaRPr lang="en-US" sz="1200" dirty="0"/>
-          </a:p>
-        </p:txBody>
-      </p:sp>
-      <p:sp>
-        <p:nvSpPr>
-          <p:cNvPr id="8" name="Text 6"/>
-          <p:cNvSpPr/>
-          <p:nvPr/>
-        </p:nvSpPr>
-        <p:spPr>
-          <a:xfrm>
-            <a:off x="634901" y="3633490"/>
-            <a:ext cx="8102798" cy="487561"/>
-          </a:xfrm>
-          <a:prstGeom prst="rect">
-            <a:avLst/>
-          </a:prstGeom>
-          <a:noFill/>
-          <a:ln/>
-        </p:spPr>
-        <p:txBody>
-          <a:bodyPr wrap="square" lIns="0" tIns="0" rIns="0" bIns="0" rtlCol="0" anchor="t"/>
-          <a:lstStyle/>
-          <a:p>
-            <a:pPr algn="l" marL="342900" indent="-342900">
-              <a:lnSpc>
-                <a:spcPts val="1620"/>
-              </a:lnSpc>
-              <a:spcAft>
-                <a:spcPts val="300"/>
-              </a:spcAft>
-              <a:buSzPct val="100000"/>
-              <a:buChar char="•"/>
-            </a:pPr>
-            <a:r>
-              <a:rPr lang="en-US" sz="1200" b="1" dirty="0">
-                <a:solidFill>
-                  <a:srgbClr val="1C2833"/>
-                </a:solidFill>
-                <a:latin typeface="Arial" pitchFamily="34" charset="0"/>
-                <a:ea typeface="Arial" pitchFamily="34" charset="-122"/>
-                <a:cs typeface="Arial" pitchFamily="34" charset="-120"/>
-              </a:rPr>
-              <a:t>Important framing:</a:t>
-            </a:r>
-            <a:pPr algn="l" indent="0" marL="0">
-              <a:lnSpc>
-                <a:spcPts val="1620"/>
-              </a:lnSpc>
-              <a:spcAft>
-                <a:spcPts val="300"/>
-              </a:spcAft>
-              <a:buNone/>
-            </a:pPr>
-            <a:r>
-              <a:rPr lang="en-US" sz="1200" dirty="0">
-                <a:solidFill>
-                  <a:srgbClr val="1C2833"/>
-                </a:solidFill>
-                <a:latin typeface="Arial" pitchFamily="34" charset="0"/>
-                <a:ea typeface="Arial" pitchFamily="34" charset="-122"/>
-                <a:cs typeface="Arial" pitchFamily="34" charset="-120"/>
-              </a:rPr>
-              <a:t> </a:t>
-            </a:r>
-            <a:pPr algn="l" indent="0" marL="0">
-              <a:lnSpc>
-                <a:spcPts val="1620"/>
-              </a:lnSpc>
-              <a:spcAft>
-                <a:spcPts val="300"/>
-              </a:spcAft>
-              <a:buNone/>
-            </a:pPr>
-            <a:r>
-              <a:rPr lang="en-US" sz="1200" b="1" dirty="0">
-                <a:solidFill>
-                  <a:srgbClr val="1C2833"/>
-                </a:solidFill>
-                <a:latin typeface="Arial" pitchFamily="34" charset="0"/>
-                <a:ea typeface="Arial" pitchFamily="34" charset="-122"/>
-                <a:cs typeface="Arial" pitchFamily="34" charset="-120"/>
-              </a:rPr>
-              <a:t>Everyone has all three doshas.</a:t>
-            </a:r>
-            <a:pPr algn="l" indent="0" marL="0">
-              <a:lnSpc>
-                <a:spcPts val="1620"/>
-              </a:lnSpc>
-              <a:spcAft>
-                <a:spcPts val="300"/>
-              </a:spcAft>
-              <a:buNone/>
-            </a:pPr>
-            <a:r>
-              <a:rPr lang="en-US" sz="1200" dirty="0">
-                <a:solidFill>
-                  <a:srgbClr val="1C2833"/>
-                </a:solidFill>
-                <a:latin typeface="Arial" pitchFamily="34" charset="0"/>
-                <a:ea typeface="Arial" pitchFamily="34" charset="-122"/>
-                <a:cs typeface="Arial" pitchFamily="34" charset="-120"/>
-              </a:rPr>
-              <a:t> Your </a:t>
-            </a:r>
-            <a:pPr algn="l" indent="0" marL="0">
-              <a:lnSpc>
-                <a:spcPts val="1620"/>
-              </a:lnSpc>
-              <a:spcAft>
-                <a:spcPts val="300"/>
-              </a:spcAft>
-              <a:buNone/>
-            </a:pPr>
-            <a:r>
-              <a:rPr lang="en-US" sz="1200" i="1" dirty="0">
-                <a:solidFill>
-                  <a:srgbClr val="1C2833"/>
-                </a:solidFill>
-                <a:latin typeface="Arial" pitchFamily="34" charset="0"/>
-                <a:ea typeface="Arial" pitchFamily="34" charset="-122"/>
-                <a:cs typeface="Arial" pitchFamily="34" charset="-120"/>
-              </a:rPr>
-              <a:t>prakṛti</a:t>
-            </a:r>
-            <a:pPr algn="l" indent="0" marL="0">
-              <a:lnSpc>
-                <a:spcPts val="1620"/>
-              </a:lnSpc>
-              <a:spcAft>
-                <a:spcPts val="300"/>
-              </a:spcAft>
-              <a:buNone/>
-            </a:pPr>
-            <a:r>
-              <a:rPr lang="en-US" sz="1200" dirty="0">
-                <a:solidFill>
-                  <a:srgbClr val="1C2833"/>
-                </a:solidFill>
-                <a:latin typeface="Arial" pitchFamily="34" charset="0"/>
-                <a:ea typeface="Arial" pitchFamily="34" charset="-122"/>
-                <a:cs typeface="Arial" pitchFamily="34" charset="-120"/>
-              </a:rPr>
-              <a:t> (constitution) is the proportion you're born with. Your </a:t>
-            </a:r>
-            <a:pPr algn="l" indent="0" marL="0">
-              <a:lnSpc>
-                <a:spcPts val="1620"/>
-              </a:lnSpc>
-              <a:spcAft>
-                <a:spcPts val="300"/>
-              </a:spcAft>
-              <a:buNone/>
-            </a:pPr>
-            <a:r>
-              <a:rPr lang="en-US" sz="1200" i="1" dirty="0">
-                <a:solidFill>
-                  <a:srgbClr val="1C2833"/>
-                </a:solidFill>
-                <a:latin typeface="Arial" pitchFamily="34" charset="0"/>
-                <a:ea typeface="Arial" pitchFamily="34" charset="-122"/>
-                <a:cs typeface="Arial" pitchFamily="34" charset="-120"/>
-              </a:rPr>
-              <a:t>vikṛti</a:t>
-            </a:r>
-            <a:pPr algn="l" indent="0" marL="0">
-              <a:lnSpc>
-                <a:spcPts val="1620"/>
-              </a:lnSpc>
-              <a:spcAft>
-                <a:spcPts val="300"/>
-              </a:spcAft>
-              <a:buNone/>
-            </a:pPr>
-            <a:r>
-              <a:rPr lang="en-US" sz="1200" dirty="0">
-                <a:solidFill>
-                  <a:srgbClr val="1C2833"/>
-                </a:solidFill>
-                <a:latin typeface="Arial" pitchFamily="34" charset="0"/>
-                <a:ea typeface="Arial" pitchFamily="34" charset="-122"/>
-                <a:cs typeface="Arial" pitchFamily="34" charset="-120"/>
-              </a:rPr>
-              <a:t> (current state) is your present balance.</a:t>
-            </a:r>
-            <a:endParaRPr lang="en-US" sz="1200" dirty="0"/>
-          </a:p>
-        </p:txBody>
-      </p:sp>
-      <p:sp>
-        <p:nvSpPr>
-          <p:cNvPr id="9" name="Text 7"/>
-          <p:cNvSpPr/>
-          <p:nvPr/>
-        </p:nvSpPr>
-        <p:spPr>
-          <a:xfrm>
-            <a:off x="634901" y="4222552"/>
-            <a:ext cx="8102798" cy="281880"/>
-          </a:xfrm>
-          <a:prstGeom prst="rect">
-            <a:avLst/>
-          </a:prstGeom>
-          <a:noFill/>
-          <a:ln/>
-        </p:spPr>
-        <p:txBody>
-          <a:bodyPr wrap="square" lIns="0" tIns="0" rIns="0" bIns="0" rtlCol="0" anchor="t"/>
-          <a:lstStyle/>
-          <a:p>
-            <a:pPr algn="l" marL="342900" indent="-342900">
-              <a:lnSpc>
-                <a:spcPts val="1620"/>
-              </a:lnSpc>
-              <a:spcAft>
-                <a:spcPts val="300"/>
-              </a:spcAft>
-              <a:buSzPct val="100000"/>
-              <a:buChar char="•"/>
-            </a:pPr>
-            <a:r>
-              <a:rPr lang="en-US" sz="1200" b="1" dirty="0">
-                <a:solidFill>
-                  <a:srgbClr val="1C2833"/>
-                </a:solidFill>
-                <a:latin typeface="Arial" pitchFamily="34" charset="0"/>
-                <a:ea typeface="Arial" pitchFamily="34" charset="-122"/>
-                <a:cs typeface="Arial" pitchFamily="34" charset="-120"/>
-              </a:rPr>
-              <a:t>Where modern medicine agrees, where it doesn't:</a:t>
-            </a:r>
-            <a:endParaRPr lang="en-US" sz="1200" dirty="0"/>
-          </a:p>
-        </p:txBody>
-      </p:sp>
-      <p:sp>
-        <p:nvSpPr>
-          <p:cNvPr id="10" name="Text 8"/>
-          <p:cNvSpPr/>
-          <p:nvPr/>
-        </p:nvSpPr>
-        <p:spPr>
-          <a:xfrm>
-            <a:off x="406301" y="4593282"/>
-            <a:ext cx="8498026" cy="639812"/>
-          </a:xfrm>
-          <a:prstGeom prst="rect">
-            <a:avLst/>
-          </a:prstGeom>
-          <a:noFill/>
-          <a:ln/>
-        </p:spPr>
-        <p:txBody>
-          <a:bodyPr wrap="square" lIns="0" tIns="0" rIns="0" bIns="0" rtlCol="0" anchor="t"/>
-          <a:lstStyle/>
-          <a:p>
-            <a:pPr algn="l" indent="0" marL="0">
-              <a:lnSpc>
-                <a:spcPts val="1680"/>
-              </a:lnSpc>
-              <a:spcBef>
-                <a:spcPts val="300"/>
-              </a:spcBef>
-              <a:spcAft>
-                <a:spcPts val="300"/>
-              </a:spcAft>
-              <a:buNone/>
-            </a:pPr>
-            <a:r>
-              <a:rPr lang="en-US" sz="1200" dirty="0">
-                <a:solidFill>
-                  <a:srgbClr val="1C2833"/>
-                </a:solidFill>
-                <a:latin typeface="Arial" pitchFamily="34" charset="0"/>
-                <a:ea typeface="Arial" pitchFamily="34" charset="-122"/>
-                <a:cs typeface="Arial" pitchFamily="34" charset="-120"/>
-              </a:rPr>
-              <a:t>– Modern lifestyle medicine: agrees on regular sleep, balanced meals, moderate exercise. – Modern circadian biology: agrees on aligning daily activities with body rhythms. – Modern dosha-as-biomedical-category: </a:t>
-            </a:r>
-            <a:pPr algn="l" indent="0" marL="0">
-              <a:lnSpc>
-                <a:spcPts val="1680"/>
-              </a:lnSpc>
-              <a:spcBef>
-                <a:spcPts val="300"/>
-              </a:spcBef>
-              <a:spcAft>
-                <a:spcPts val="300"/>
-              </a:spcAft>
-              <a:buNone/>
-            </a:pPr>
-            <a:r>
-              <a:rPr lang="en-US" sz="1200" b="1" dirty="0">
-                <a:solidFill>
-                  <a:srgbClr val="1C2833"/>
-                </a:solidFill>
-                <a:latin typeface="Arial" pitchFamily="34" charset="0"/>
-                <a:ea typeface="Arial" pitchFamily="34" charset="-122"/>
-                <a:cs typeface="Arial" pitchFamily="34" charset="-120"/>
-              </a:rPr>
-              <a:t>mixed evidence</a:t>
-            </a:r>
-            <a:pPr algn="l" indent="0" marL="0">
-              <a:lnSpc>
-                <a:spcPts val="1680"/>
-              </a:lnSpc>
-              <a:spcBef>
-                <a:spcPts val="300"/>
-              </a:spcBef>
-              <a:spcAft>
-                <a:spcPts val="300"/>
-              </a:spcAft>
-              <a:buNone/>
-            </a:pPr>
-            <a:r>
-              <a:rPr lang="en-US" sz="1200" dirty="0">
-                <a:solidFill>
-                  <a:srgbClr val="1C2833"/>
-                </a:solidFill>
-                <a:latin typeface="Arial" pitchFamily="34" charset="0"/>
-                <a:ea typeface="Arial" pitchFamily="34" charset="-122"/>
-                <a:cs typeface="Arial" pitchFamily="34" charset="-120"/>
-              </a:rPr>
-              <a:t>. Some studies show correlates with body type and metabolism; others don't.</a:t>
-            </a:r>
-            <a:endParaRPr lang="en-US" sz="1200" dirty="0"/>
-          </a:p>
-        </p:txBody>
-      </p:sp>
-      <p:sp>
-        <p:nvSpPr>
-          <p:cNvPr id="11" name="Text 9"/>
-          <p:cNvSpPr/>
-          <p:nvPr/>
-        </p:nvSpPr>
-        <p:spPr>
-          <a:xfrm>
-            <a:off x="406301" y="5385495"/>
+            <a:off x="406301" y="4434929"/>
             <a:ext cx="8498026" cy="213271"/>
           </a:xfrm>
           <a:prstGeom prst="rect">
@@ -4824,7 +5492,7 @@
                 <a:ea typeface="Georgia" pitchFamily="34" charset="-122"/>
                 <a:cs typeface="Georgia" pitchFamily="34" charset="-120"/>
               </a:rPr>
-              <a:t>Activity (10 min) — Sign spotting</a:t>
+              <a:t>Core (25 min)</a:t>
             </a:r>
             <a:endParaRPr lang="en-US" sz="1800" dirty="0"/>
           </a:p>
@@ -4838,8 +5506,8 @@
         </p:nvSpPr>
         <p:spPr>
           <a:xfrm>
-            <a:off x="406301" y="870942"/>
-            <a:ext cx="8498026" cy="213271"/>
+            <a:off x="634901" y="883593"/>
+            <a:ext cx="8102798" cy="281880"/>
           </a:xfrm>
           <a:prstGeom prst="rect">
             <a:avLst/>
@@ -4851,28 +5519,26 @@
           <a:bodyPr wrap="square" lIns="0" tIns="0" rIns="0" bIns="0" rtlCol="0" anchor="t"/>
           <a:lstStyle/>
           <a:p>
-            <a:pPr algn="l" indent="0" marL="0">
-              <a:lnSpc>
-                <a:spcPts val="1680"/>
-              </a:lnSpc>
-              <a:spcBef>
-                <a:spcPts val="300"/>
-              </a:spcBef>
-              <a:spcAft>
-                <a:spcPts val="300"/>
-              </a:spcAft>
-              <a:buNone/>
-            </a:pPr>
-            <a:r>
-              <a:rPr lang="en-US" sz="1200" dirty="0">
-                <a:solidFill>
-                  <a:srgbClr val="1C2833"/>
-                </a:solidFill>
-                <a:latin typeface="Arial" pitchFamily="34" charset="0"/>
-                <a:ea typeface="Arial" pitchFamily="34" charset="-122"/>
-                <a:cs typeface="Arial" pitchFamily="34" charset="-120"/>
-              </a:rPr>
-              <a:t>Students think of one person they know (not themselves). Write 3 observable traits. Try to match to a dosha tilt.</a:t>
+            <a:pPr algn="l" marL="342900" indent="-342900">
+              <a:lnSpc>
+                <a:spcPts val="1620"/>
+              </a:lnSpc>
+              <a:spcAft>
+                <a:spcPts val="300"/>
+              </a:spcAft>
+              <a:buSzPct val="100000"/>
+              <a:buChar char="•"/>
+            </a:pPr>
+            <a:r>
+              <a:rPr lang="en-US" sz="1200" b="1" dirty="0">
+                <a:solidFill>
+                  <a:srgbClr val="1C2833"/>
+                </a:solidFill>
+                <a:latin typeface="Arial" pitchFamily="34" charset="0"/>
+                <a:ea typeface="Arial" pitchFamily="34" charset="-122"/>
+                <a:cs typeface="Arial" pitchFamily="34" charset="-120"/>
+              </a:rPr>
+              <a:t>Build the dosha table on the board:</a:t>
             </a:r>
             <a:endParaRPr lang="en-US" sz="1200" dirty="0"/>
           </a:p>
@@ -4886,7 +5552,7 @@
         </p:nvSpPr>
         <p:spPr>
           <a:xfrm>
-            <a:off x="406301" y="1160413"/>
+            <a:off x="406301" y="1254323"/>
             <a:ext cx="8498026" cy="213271"/>
           </a:xfrm>
           <a:prstGeom prst="rect">
@@ -4912,15 +5578,15 @@
               <a:buNone/>
             </a:pPr>
             <a:r>
-              <a:rPr lang="en-US" sz="1200" dirty="0">
-                <a:solidFill>
-                  <a:srgbClr val="1C2833"/>
-                </a:solidFill>
-                <a:latin typeface="Arial" pitchFamily="34" charset="0"/>
-                <a:ea typeface="Arial" pitchFamily="34" charset="-122"/>
-                <a:cs typeface="Arial" pitchFamily="34" charset="-120"/>
-              </a:rPr>
-              <a:t>(Stress: NOT diagnostic. Just practice with the framework.)</a:t>
+              <a:rPr lang="en-US" sz="1200" i="1" dirty="0">
+                <a:solidFill>
+                  <a:srgbClr val="1C2833"/>
+                </a:solidFill>
+                <a:latin typeface="Arial" pitchFamily="34" charset="0"/>
+                <a:ea typeface="Arial" pitchFamily="34" charset="-122"/>
+                <a:cs typeface="Arial" pitchFamily="34" charset="-120"/>
+              </a:rPr>
+              <a:t>Each row: Dosha · Elements · Qualities · Function · When out of balance.</a:t>
             </a:r>
             <a:endParaRPr lang="en-US" sz="1200" dirty="0"/>
           </a:p>
@@ -5078,7 +5744,7 @@
                 <a:ea typeface="Georgia" pitchFamily="34" charset="-122"/>
                 <a:cs typeface="Georgia" pitchFamily="34" charset="-120"/>
               </a:rPr>
-              <a:t>Wrap-up (5 min)</a:t>
+              <a:t>Core (25 min) (cont.)</a:t>
             </a:r>
             <a:endParaRPr lang="en-US" sz="1800" dirty="0"/>
           </a:p>
@@ -5092,8 +5758,8 @@
         </p:nvSpPr>
         <p:spPr>
           <a:xfrm>
-            <a:off x="406301" y="870942"/>
-            <a:ext cx="8498026" cy="213271"/>
+            <a:off x="634901" y="883593"/>
+            <a:ext cx="8102798" cy="1386483"/>
           </a:xfrm>
           <a:prstGeom prst="rect">
             <a:avLst/>
@@ -5105,13 +5771,31 @@
           <a:bodyPr wrap="square" lIns="0" tIns="0" rIns="0" bIns="0" rtlCol="0" anchor="t"/>
           <a:lstStyle/>
           <a:p>
+            <a:pPr algn="l" marL="342900" indent="-342900">
+              <a:lnSpc>
+                <a:spcPts val="1620"/>
+              </a:lnSpc>
+              <a:spcAft>
+                <a:spcPts val="300"/>
+              </a:spcAft>
+              <a:buSzPct val="100000"/>
+              <a:buChar char="•"/>
+            </a:pPr>
+            <a:r>
+              <a:rPr lang="en-US" sz="1200" b="1" dirty="0">
+                <a:solidFill>
+                  <a:srgbClr val="1C2833"/>
+                </a:solidFill>
+                <a:latin typeface="Arial" pitchFamily="34" charset="0"/>
+                <a:ea typeface="Arial" pitchFamily="34" charset="-122"/>
+                <a:cs typeface="Arial" pitchFamily="34" charset="-120"/>
+              </a:rPr>
+              <a:t>Vāta</a:t>
+            </a:r>
             <a:pPr algn="l" indent="0" marL="0">
               <a:lnSpc>
-                <a:spcPts val="1680"/>
-              </a:lnSpc>
-              <a:spcBef>
-                <a:spcPts val="300"/>
-              </a:spcBef>
+                <a:spcPts val="1620"/>
+              </a:lnSpc>
               <a:spcAft>
                 <a:spcPts val="300"/>
               </a:spcAft>
@@ -5126,30 +5810,95 @@
                 <a:ea typeface="Arial" pitchFamily="34" charset="-122"/>
                 <a:cs typeface="Arial" pitchFamily="34" charset="-120"/>
               </a:rPr>
-              <a:t>– Preview Day 3: </a:t>
+              <a:t> — air + space · mobile, dry, light, cold, rough · Movement, breath, nervous system · Anxiety, insomnia, dry skin, constipation</a:t>
+            </a:r>
+            <a:endParaRPr lang="en-US" sz="1200" dirty="0"/>
+          </a:p>
+          <a:p>
+            <a:pPr algn="l" marL="342900" indent="-342900">
+              <a:lnSpc>
+                <a:spcPts val="1620"/>
+              </a:lnSpc>
+              <a:spcAft>
+                <a:spcPts val="300"/>
+              </a:spcAft>
+              <a:buSzPct val="100000"/>
+              <a:buChar char="•"/>
+            </a:pPr>
+            <a:r>
+              <a:rPr lang="en-US" sz="1200" b="1" dirty="0">
+                <a:solidFill>
+                  <a:srgbClr val="1C2833"/>
+                </a:solidFill>
+                <a:latin typeface="Arial" pitchFamily="34" charset="0"/>
+                <a:ea typeface="Arial" pitchFamily="34" charset="-122"/>
+                <a:cs typeface="Arial" pitchFamily="34" charset="-120"/>
+              </a:rPr>
+              <a:t>Pitta</a:t>
             </a:r>
             <a:pPr algn="l" indent="0" marL="0">
               <a:lnSpc>
-                <a:spcPts val="1680"/>
-              </a:lnSpc>
-              <a:spcBef>
-                <a:spcPts val="300"/>
-              </a:spcBef>
-              <a:spcAft>
-                <a:spcPts val="300"/>
-              </a:spcAft>
-              <a:buNone/>
-            </a:pPr>
-            <a:r>
-              <a:rPr lang="en-US" sz="1200" i="1" dirty="0">
-                <a:solidFill>
-                  <a:srgbClr val="1C2833"/>
-                </a:solidFill>
-                <a:latin typeface="Arial" pitchFamily="34" charset="0"/>
-                <a:ea typeface="Arial" pitchFamily="34" charset="-122"/>
-                <a:cs typeface="Arial" pitchFamily="34" charset="-120"/>
-              </a:rPr>
-              <a:t>"Tomorrow — your own self-assessment. With caveats."</a:t>
+                <a:spcPts val="1620"/>
+              </a:lnSpc>
+              <a:spcAft>
+                <a:spcPts val="300"/>
+              </a:spcAft>
+              <a:buNone/>
+            </a:pPr>
+            <a:r>
+              <a:rPr lang="en-US" sz="1200" dirty="0">
+                <a:solidFill>
+                  <a:srgbClr val="1C2833"/>
+                </a:solidFill>
+                <a:latin typeface="Arial" pitchFamily="34" charset="0"/>
+                <a:ea typeface="Arial" pitchFamily="34" charset="-122"/>
+                <a:cs typeface="Arial" pitchFamily="34" charset="-120"/>
+              </a:rPr>
+              <a:t> — fire + water · hot, sharp, light, oily, slightly liquid · Digestion, metabolism, vision · Heartburn, irritability, skin inflammation</a:t>
+            </a:r>
+            <a:endParaRPr lang="en-US" sz="1200" dirty="0"/>
+          </a:p>
+          <a:p>
+            <a:pPr algn="l" marL="342900" indent="-342900">
+              <a:lnSpc>
+                <a:spcPts val="1620"/>
+              </a:lnSpc>
+              <a:spcAft>
+                <a:spcPts val="300"/>
+              </a:spcAft>
+              <a:buSzPct val="100000"/>
+              <a:buChar char="•"/>
+            </a:pPr>
+            <a:r>
+              <a:rPr lang="en-US" sz="1200" b="1" dirty="0">
+                <a:solidFill>
+                  <a:srgbClr val="1C2833"/>
+                </a:solidFill>
+                <a:latin typeface="Arial" pitchFamily="34" charset="0"/>
+                <a:ea typeface="Arial" pitchFamily="34" charset="-122"/>
+                <a:cs typeface="Arial" pitchFamily="34" charset="-120"/>
+              </a:rPr>
+              <a:t>Kapha</a:t>
+            </a:r>
+            <a:pPr algn="l" indent="0" marL="0">
+              <a:lnSpc>
+                <a:spcPts val="1620"/>
+              </a:lnSpc>
+              <a:spcAft>
+                <a:spcPts val="300"/>
+              </a:spcAft>
+              <a:buNone/>
+            </a:pPr>
+            <a:r>
+              <a:rPr lang="en-US" sz="1200" dirty="0">
+                <a:solidFill>
+                  <a:srgbClr val="1C2833"/>
+                </a:solidFill>
+                <a:latin typeface="Arial" pitchFamily="34" charset="0"/>
+                <a:ea typeface="Arial" pitchFamily="34" charset="-122"/>
+                <a:cs typeface="Arial" pitchFamily="34" charset="-120"/>
+              </a:rPr>
+              <a:t> — water + earth · heavy, slow, cool, oily, smooth · Structure, immunity, lubrication · Lethargy, congestion, weight gain</a:t>
             </a:r>
             <a:endParaRPr lang="en-US" sz="1200" dirty="0"/>
           </a:p>
@@ -5307,7 +6056,7 @@
                 <a:ea typeface="Georgia" pitchFamily="34" charset="-122"/>
                 <a:cs typeface="Georgia" pitchFamily="34" charset="-120"/>
               </a:rPr>
-              <a:t>Homework</a:t>
+              <a:t>Core (25 min) (cont.)</a:t>
             </a:r>
             <a:endParaRPr lang="en-US" sz="1800" dirty="0"/>
           </a:p>
@@ -5321,8 +6070,8 @@
         </p:nvSpPr>
         <p:spPr>
           <a:xfrm>
-            <a:off x="406301" y="870942"/>
-            <a:ext cx="8498026" cy="213271"/>
+            <a:off x="634901" y="883593"/>
+            <a:ext cx="8102798" cy="487561"/>
           </a:xfrm>
           <a:prstGeom prst="rect">
             <a:avLst/>
@@ -5334,13 +6083,31 @@
           <a:bodyPr wrap="square" lIns="0" tIns="0" rIns="0" bIns="0" rtlCol="0" anchor="t"/>
           <a:lstStyle/>
           <a:p>
+            <a:pPr algn="l" marL="342900" indent="-342900">
+              <a:lnSpc>
+                <a:spcPts val="1620"/>
+              </a:lnSpc>
+              <a:spcAft>
+                <a:spcPts val="300"/>
+              </a:spcAft>
+              <a:buSzPct val="100000"/>
+              <a:buChar char="•"/>
+            </a:pPr>
+            <a:r>
+              <a:rPr lang="en-US" sz="1200" b="1" dirty="0">
+                <a:solidFill>
+                  <a:srgbClr val="1C2833"/>
+                </a:solidFill>
+                <a:latin typeface="Arial" pitchFamily="34" charset="0"/>
+                <a:ea typeface="Arial" pitchFamily="34" charset="-122"/>
+                <a:cs typeface="Arial" pitchFamily="34" charset="-120"/>
+              </a:rPr>
+              <a:t>Note the connection to Module 2.</a:t>
+            </a:r>
             <a:pPr algn="l" indent="0" marL="0">
               <a:lnSpc>
-                <a:spcPts val="1680"/>
-              </a:lnSpc>
-              <a:spcBef>
-                <a:spcPts val="300"/>
-              </a:spcBef>
+                <a:spcPts val="1620"/>
+              </a:lnSpc>
               <a:spcAft>
                 <a:spcPts val="300"/>
               </a:spcAft>
@@ -5355,7 +6122,47 @@
                 <a:ea typeface="Arial" pitchFamily="34" charset="-122"/>
                 <a:cs typeface="Arial" pitchFamily="34" charset="-120"/>
               </a:rPr>
-              <a:t>– Notice tonight: what did you eat? When? How did you feel after? Take notes.</a:t>
+              <a:t> The doshas are built from the </a:t>
+            </a:r>
+            <a:pPr algn="l" indent="0" marL="0">
+              <a:lnSpc>
+                <a:spcPts val="1620"/>
+              </a:lnSpc>
+              <a:spcAft>
+                <a:spcPts val="300"/>
+              </a:spcAft>
+              <a:buNone/>
+            </a:pPr>
+            <a:r>
+              <a:rPr lang="en-US" sz="1200" i="1" dirty="0">
+                <a:solidFill>
+                  <a:srgbClr val="1C2833"/>
+                </a:solidFill>
+                <a:latin typeface="Arial" pitchFamily="34" charset="0"/>
+                <a:ea typeface="Arial" pitchFamily="34" charset="-122"/>
+                <a:cs typeface="Arial" pitchFamily="34" charset="-120"/>
+              </a:rPr>
+              <a:t>pañcabhūta</a:t>
+            </a:r>
+            <a:pPr algn="l" indent="0" marL="0">
+              <a:lnSpc>
+                <a:spcPts val="1620"/>
+              </a:lnSpc>
+              <a:spcAft>
+                <a:spcPts val="300"/>
+              </a:spcAft>
+              <a:buNone/>
+            </a:pPr>
+            <a:r>
+              <a:rPr lang="en-US" sz="1200" dirty="0">
+                <a:solidFill>
+                  <a:srgbClr val="1C2833"/>
+                </a:solidFill>
+                <a:latin typeface="Arial" pitchFamily="34" charset="0"/>
+                <a:ea typeface="Arial" pitchFamily="34" charset="-122"/>
+                <a:cs typeface="Arial" pitchFamily="34" charset="-120"/>
+              </a:rPr>
+              <a:t> (five elements). Each dosha is a particular combination of elements + qualities.</a:t>
             </a:r>
             <a:endParaRPr lang="en-US" sz="1200" dirty="0"/>
           </a:p>
@@ -5364,6 +6171,192 @@
       <p:sp>
         <p:nvSpPr>
           <p:cNvPr id="5" name="Text 3"/>
+          <p:cNvSpPr/>
+          <p:nvPr/>
+        </p:nvSpPr>
+        <p:spPr>
+          <a:xfrm>
+            <a:off x="634901" y="1472654"/>
+            <a:ext cx="8102798" cy="487561"/>
+          </a:xfrm>
+          <a:prstGeom prst="rect">
+            <a:avLst/>
+          </a:prstGeom>
+          <a:noFill/>
+          <a:ln/>
+        </p:spPr>
+        <p:txBody>
+          <a:bodyPr wrap="square" lIns="0" tIns="0" rIns="0" bIns="0" rtlCol="0" anchor="t"/>
+          <a:lstStyle/>
+          <a:p>
+            <a:pPr algn="l" marL="342900" indent="-342900">
+              <a:lnSpc>
+                <a:spcPts val="1620"/>
+              </a:lnSpc>
+              <a:spcAft>
+                <a:spcPts val="300"/>
+              </a:spcAft>
+              <a:buSzPct val="100000"/>
+              <a:buChar char="•"/>
+            </a:pPr>
+            <a:r>
+              <a:rPr lang="en-US" sz="1200" b="1" dirty="0">
+                <a:solidFill>
+                  <a:srgbClr val="1C2833"/>
+                </a:solidFill>
+                <a:latin typeface="Arial" pitchFamily="34" charset="0"/>
+                <a:ea typeface="Arial" pitchFamily="34" charset="-122"/>
+                <a:cs typeface="Arial" pitchFamily="34" charset="-120"/>
+              </a:rPr>
+              <a:t>Important framing:</a:t>
+            </a:r>
+            <a:pPr algn="l" indent="0" marL="0">
+              <a:lnSpc>
+                <a:spcPts val="1620"/>
+              </a:lnSpc>
+              <a:spcAft>
+                <a:spcPts val="300"/>
+              </a:spcAft>
+              <a:buNone/>
+            </a:pPr>
+            <a:r>
+              <a:rPr lang="en-US" sz="1200" dirty="0">
+                <a:solidFill>
+                  <a:srgbClr val="1C2833"/>
+                </a:solidFill>
+                <a:latin typeface="Arial" pitchFamily="34" charset="0"/>
+                <a:ea typeface="Arial" pitchFamily="34" charset="-122"/>
+                <a:cs typeface="Arial" pitchFamily="34" charset="-120"/>
+              </a:rPr>
+              <a:t> </a:t>
+            </a:r>
+            <a:pPr algn="l" indent="0" marL="0">
+              <a:lnSpc>
+                <a:spcPts val="1620"/>
+              </a:lnSpc>
+              <a:spcAft>
+                <a:spcPts val="300"/>
+              </a:spcAft>
+              <a:buNone/>
+            </a:pPr>
+            <a:r>
+              <a:rPr lang="en-US" sz="1200" b="1" dirty="0">
+                <a:solidFill>
+                  <a:srgbClr val="1C2833"/>
+                </a:solidFill>
+                <a:latin typeface="Arial" pitchFamily="34" charset="0"/>
+                <a:ea typeface="Arial" pitchFamily="34" charset="-122"/>
+                <a:cs typeface="Arial" pitchFamily="34" charset="-120"/>
+              </a:rPr>
+              <a:t>Everyone has all three doshas.</a:t>
+            </a:r>
+            <a:pPr algn="l" indent="0" marL="0">
+              <a:lnSpc>
+                <a:spcPts val="1620"/>
+              </a:lnSpc>
+              <a:spcAft>
+                <a:spcPts val="300"/>
+              </a:spcAft>
+              <a:buNone/>
+            </a:pPr>
+            <a:r>
+              <a:rPr lang="en-US" sz="1200" dirty="0">
+                <a:solidFill>
+                  <a:srgbClr val="1C2833"/>
+                </a:solidFill>
+                <a:latin typeface="Arial" pitchFamily="34" charset="0"/>
+                <a:ea typeface="Arial" pitchFamily="34" charset="-122"/>
+                <a:cs typeface="Arial" pitchFamily="34" charset="-120"/>
+              </a:rPr>
+              <a:t> Your </a:t>
+            </a:r>
+            <a:pPr algn="l" indent="0" marL="0">
+              <a:lnSpc>
+                <a:spcPts val="1620"/>
+              </a:lnSpc>
+              <a:spcAft>
+                <a:spcPts val="300"/>
+              </a:spcAft>
+              <a:buNone/>
+            </a:pPr>
+            <a:r>
+              <a:rPr lang="en-US" sz="1200" i="1" dirty="0">
+                <a:solidFill>
+                  <a:srgbClr val="1C2833"/>
+                </a:solidFill>
+                <a:latin typeface="Arial" pitchFamily="34" charset="0"/>
+                <a:ea typeface="Arial" pitchFamily="34" charset="-122"/>
+                <a:cs typeface="Arial" pitchFamily="34" charset="-120"/>
+              </a:rPr>
+              <a:t>prakṛti</a:t>
+            </a:r>
+            <a:pPr algn="l" indent="0" marL="0">
+              <a:lnSpc>
+                <a:spcPts val="1620"/>
+              </a:lnSpc>
+              <a:spcAft>
+                <a:spcPts val="300"/>
+              </a:spcAft>
+              <a:buNone/>
+            </a:pPr>
+            <a:r>
+              <a:rPr lang="en-US" sz="1200" dirty="0">
+                <a:solidFill>
+                  <a:srgbClr val="1C2833"/>
+                </a:solidFill>
+                <a:latin typeface="Arial" pitchFamily="34" charset="0"/>
+                <a:ea typeface="Arial" pitchFamily="34" charset="-122"/>
+                <a:cs typeface="Arial" pitchFamily="34" charset="-120"/>
+              </a:rPr>
+              <a:t> (constitution) is the proportion you're born with. Your </a:t>
+            </a:r>
+            <a:pPr algn="l" indent="0" marL="0">
+              <a:lnSpc>
+                <a:spcPts val="1620"/>
+              </a:lnSpc>
+              <a:spcAft>
+                <a:spcPts val="300"/>
+              </a:spcAft>
+              <a:buNone/>
+            </a:pPr>
+            <a:r>
+              <a:rPr lang="en-US" sz="1200" i="1" dirty="0">
+                <a:solidFill>
+                  <a:srgbClr val="1C2833"/>
+                </a:solidFill>
+                <a:latin typeface="Arial" pitchFamily="34" charset="0"/>
+                <a:ea typeface="Arial" pitchFamily="34" charset="-122"/>
+                <a:cs typeface="Arial" pitchFamily="34" charset="-120"/>
+              </a:rPr>
+              <a:t>vikṛti</a:t>
+            </a:r>
+            <a:pPr algn="l" indent="0" marL="0">
+              <a:lnSpc>
+                <a:spcPts val="1620"/>
+              </a:lnSpc>
+              <a:spcAft>
+                <a:spcPts val="300"/>
+              </a:spcAft>
+              <a:buNone/>
+            </a:pPr>
+            <a:r>
+              <a:rPr lang="en-US" sz="1200" dirty="0">
+                <a:solidFill>
+                  <a:srgbClr val="1C2833"/>
+                </a:solidFill>
+                <a:latin typeface="Arial" pitchFamily="34" charset="0"/>
+                <a:ea typeface="Arial" pitchFamily="34" charset="-122"/>
+                <a:cs typeface="Arial" pitchFamily="34" charset="-120"/>
+              </a:rPr>
+              <a:t> (current state) is your present balance.</a:t>
+            </a:r>
+            <a:endParaRPr lang="en-US" sz="1200" dirty="0"/>
+          </a:p>
+        </p:txBody>
+      </p:sp>
+      <p:sp>
+        <p:nvSpPr>
+          <p:cNvPr id="6" name="Text 4"/>
           <p:cNvSpPr/>
           <p:nvPr/>
         </p:nvSpPr>
